--- a/docs/Atlanta_Heat_Resilience_2_Slide_Deck.pptx
+++ b/docs/Atlanta_Heat_Resilience_2_Slide_Deck.pptx
@@ -4979,7 +4979,7 @@
                   <a:srgbClr val="202124"/>
                 </a:solidFill>
               </a:rPr>
-              <a:t>Reasoning agent configured with Google ADK runtime and 7 custom Python domain tools (&lt;600ms latency).</a:t>
+              <a:t>Google ADK runtime with isolated sessions, bounded spatial guards, and correlated telemetry spans.</a:t>
             </a:r>
           </a:p>
           <a:p>
@@ -5002,7 +5002,7 @@
                   <a:srgbClr val="202124"/>
                 </a:solidFill>
               </a:rPr>
-              <a:t>heat_offset_model trained on NOAA Heat Watch traverses + CDC SVI. ML.EXPLAIN_PREDICT outputs exact feature attributions.</a:t>
+              <a:t>heat_offset_model on NOAA Heat Watch + CDC SVI. ML.EXPLAIN_PREDICT outputs exact feature attributions.</a:t>
             </a:r>
           </a:p>
           <a:p>
@@ -5017,7 +5017,7 @@
                   <a:srgbClr val="202124"/>
                 </a:solidFill>
               </a:rPr>
-              <a:t>• Serverless Cloud Run Backend: </a:t>
+              <a:t>• Serverless Cloud Run &amp; Vertex ADC: </a:t>
             </a:r>
             <a:r>
               <a:rPr sz="950">
@@ -5025,7 +5025,7 @@
                   <a:srgbClr val="202124"/>
                 </a:solidFill>
               </a:rPr>
-              <a:t>Live containerized FastAPI service hosting /run and returning structured tool execution traces.</a:t>
+              <a:t>Gen2 service with GOOGLE_GENAI_USE_VERTEXAI=TRUE, native readiness polling, and zero API keys.</a:t>
             </a:r>
           </a:p>
           <a:p>
@@ -5048,7 +5048,7 @@
                   <a:srgbClr val="202124"/>
                 </a:solidFill>
               </a:rPr>
-              <a:t>React 19 + TypeScript + Leaflet with real-time temperature slider (85°–105°F) &amp; 800m isochrone overlays.</a:t>
+              <a:t>React 19 + TS + Leaflet with 85°–105°F microclimate slider, 800m isochrones, and zero-key OSM tiles.</a:t>
             </a:r>
           </a:p>
           <a:p>
@@ -5063,7 +5063,7 @@
                   <a:srgbClr val="202124"/>
                 </a:solidFill>
               </a:rPr>
-              <a:t>• Zero Client Keys: </a:t>
+              <a:t>• Vite Reverse Proxy &amp; CORS-Free: </a:t>
             </a:r>
             <a:r>
               <a:rPr sz="950">
@@ -5071,7 +5071,7 @@
                   <a:srgbClr val="202124"/>
                 </a:solidFill>
               </a:rPr>
-              <a:t>Secure enterprise design—all API keys and Vertex credentials reside safely in Cloud Secret Manager.</a:t>
+              <a:t>Reverse-proxied /api/agent eliminating CORS errors; pre-configured for port 8080 Cloud Shell Preview.</a:t>
             </a:r>
           </a:p>
         </p:txBody>

--- a/docs/Atlanta_Heat_Resilience_2_Slide_Deck.pptx
+++ b/docs/Atlanta_Heat_Resilience_2_Slide_Deck.pptx
@@ -503,19 +503,221 @@
           <a:lstStyle/>
           <a:p>
             <a:r>
-              <a:t>=== SECTION 2a: 20-SECOND INTRO (SLIDE 1 ON SCREEN) ===</a:t>
+              <a:t>=== SLIDE 1 PRESENTATION TALK TRACK &amp; 3-MINUTE VIDEO SCRIPT ===</a:t>
             </a:r>
           </a:p>
           <a:p/>
           <a:p>
             <a:r>
-              <a:t>"Good afternoon, judges. When a heat advisory hits Atlanta, news reports quote KATL Airport: 95°F. But in dense neighborhoods like Sweet Auburn and Peoplestown, microclimates run up to 4.8 degrees hotter. Over 47% of households there have no car, and tree canopy drops below 33%. For Challenge 1's budget track, Dana in the City Manager's office must site 3 permanent cooling centers before tomorrow's 9 AM City Council session. We built the Atlanta Urban Climate Resilience Advisor to solve this with BigQuery ML, pedestrian walk buffers, and an equity audit. Let's look at the live tool in action."</a:t>
+              <a:t>--- PART 1: SLIDE 1 WALKTHROUGH (FOR LIVE PITCH / PRESENTATION) ---</a:t>
+            </a:r>
+          </a:p>
+          <a:p>
+            <a:r>
+              <a:t>• Context &amp; Hook: When heat advisories hit Atlanta, regional news reports quote KATL Airport (95°F). But microclimates in dense asphalt neighborhoods run up to +4.77°F hotter.</a:t>
+            </a:r>
+          </a:p>
+          <a:p>
+            <a:r>
+              <a:t>• The Inequity: In tracts like Sweet Auburn, Peoplestown, and Mechanicsville, over 47% of households have no vehicle and canopy coverage is below 33%. Residents cannot drive or walk miles to distant regional shelters.</a:t>
+            </a:r>
+          </a:p>
+          <a:p>
+            <a:r>
+              <a:t>• The Municipal Scenario: Dana in the City Manager's Office must site 3 permanent cooling centers ahead of an imminent 102°F heatwave for City Council approval tomorrow morning.</a:t>
+            </a:r>
+          </a:p>
+          <a:p>
+            <a:r>
+              <a:t>• The Technical Solution: We built the Atlanta Heat Resilience Advisor using Vertex AI (Gemini 2.5 Flash), Google ADK runtime, and BigQuery ML (heat_offset_model + ML.EXPLAIN_PREDICT). We combine spatial microclimates with CDC SVI hardship indicators and 800m pedestrian walk isochrones.</a:t>
+            </a:r>
+          </a:p>
+          <a:p>
+            <a:r>
+              <a:t>• The Siting Recommendations: Top 3 sites identified: Sweet Auburn (Tract 27, score 0.864), South Pryor / Peoplestown (Tract 55.02, score 0.838), and Mechanicsville (Tract 56, score 0.811), sheltering 19,850 high-risk residents.</a:t>
             </a:r>
           </a:p>
           <a:p/>
           <a:p>
             <a:r>
-              <a:t>[-&gt; AT 0:20, SWITCH SCREEN-SHARE TO LIVE DEMO FOR 2m20s]</a:t>
+              <a:t>--- PART 2: VIDEO WALKTHROUGH TALK TRACK (EXACT TIMING: 0:00 - 2:40) ---</a:t>
+            </a:r>
+          </a:p>
+          <a:p/>
+          <a:p>
+            <a:r>
+              <a:t>[0:00 - 0:20] SECTION 2a: INTRO OF CHALLENGE &amp; IMPORTANCE (SLIDE 1 ON SCREEN)</a:t>
+            </a:r>
+          </a:p>
+          <a:p>
+            <a:r>
+              <a:t>"Good afternoon, judges. When a heat advisory hits Atlanta, news reports quote KATL Airport: 95°F. But in dense neighborhoods like Sweet Auburn and Peoplestown, microclimates run up to 4.8 degrees hotter.</a:t>
+            </a:r>
+          </a:p>
+          <a:p>
+            <a:r>
+              <a:t>Over 47% of households there have no car, and tree canopy drops below 33%. For Challenge 1's budget track, Dana in the City Manager's office must site 3 permanent cooling centers before tomorrow's 9 AM City Council session.</a:t>
+            </a:r>
+          </a:p>
+          <a:p>
+            <a:r>
+              <a:t>We built the Atlanta Urban Climate Resilience Advisor to solve this with BigQuery ML, pedestrian walk buffers, and an equity audit. Let's see the live tool in action."</a:t>
+            </a:r>
+          </a:p>
+          <a:p/>
+          <a:p>
+            <a:r>
+              <a:t>[AT 0:20 -&gt; SWITCH SCREEN-SHARE TO LIVE WORKING GIS DASHBOARD]</a:t>
+            </a:r>
+          </a:p>
+          <a:p/>
+          <a:p>
+            <a:r>
+              <a:t>[0:20 - 1:05] SECTION 2b - PART A: TOP 5 CAPABILITIES (45 SECONDS)</a:t>
+            </a:r>
+          </a:p>
+          <a:p>
+            <a:r>
+              <a:t>(Action: Navigate map, search 'Sweet Auburn', toggle walk buffer, click tract details, open Council Memo)</a:t>
+            </a:r>
+          </a:p>
+          <a:p>
+            <a:r>
+              <a:t>"Here is our live deployed advisor. It delivers five critical capabilities:</a:t>
+            </a:r>
+          </a:p>
+          <a:p>
+            <a:r>
+              <a:t>1. Microclimate Offset Modeling: Rather than blunt airport temperatures, our BigQuery ML model predicts localized thermal offsets—revealing Sweet Auburn is +4.61°F hotter than city baseline.</a:t>
+            </a:r>
+          </a:p>
+          <a:p>
+            <a:r>
+              <a:t>2. 10-Minute Pedestrian Isochrones: Notice these 800-meter blue walking rings. A carless resident cannot walk 3 miles in extreme heat. We test physical street access, not straight lines.</a:t>
+            </a:r>
+          </a:p>
+          <a:p>
+            <a:r>
+              <a:t>3. Talks in Street Names: Planners don't memorize Census GEOIDs. Dana simply types 'Sweet Auburn' or 'Peoplestown' and the system instantly resolves the neighborhood.</a:t>
+            </a:r>
+          </a:p>
+          <a:p>
+            <a:r>
+              <a:t>4. Multi-Objective Siting Optimization: Our algorithm balances heat exposure, poverty, and carlessness, automatically ranking Sweet Auburn, South Pryor, and Mechanicsville as the top 3 sites—sheltering nearly 20,000 residents.</a:t>
+            </a:r>
+          </a:p>
+          <a:p>
+            <a:r>
+              <a:t>5. One-Click Council Resolution Memo: A planner can export this pre-populated legislative memo with statutory justifications and model citations ready for an immediate council vote."</a:t>
+            </a:r>
+          </a:p>
+          <a:p/>
+          <a:p>
+            <a:r>
+              <a:t>[1:05 - 1:40] SECTION 2b - PART B: TOP 4 DEFENDED DECISIONS (35 SECONDS)</a:t>
+            </a:r>
+          </a:p>
+          <a:p>
+            <a:r>
+              <a:t>(Action: Switch to Equity Audit tab and highlight the 100% equity clearance card)</a:t>
+            </a:r>
+          </a:p>
+          <a:p>
+            <a:r>
+              <a:t>"We defended four core engineering decisions along the way:</a:t>
+            </a:r>
+          </a:p>
+          <a:p>
+            <a:r>
+              <a:t>1. Ethical Bias Handling: We strictly excluded race and ethnicity variables from model training to prevent self-fulfilling redlining proxies. Fairness is audited on the output instead.</a:t>
+            </a:r>
+          </a:p>
+          <a:p>
+            <a:r>
+              <a:t>2. Offset vs. Raw Temperature: Modeling thermal offsets isolates fixed physical urban built form from seasonal weather noise.</a:t>
+            </a:r>
+          </a:p>
+          <a:p>
+            <a:r>
+              <a:t>3. Hardship Threshold Benchmarking: We audit candidate sites against Atlanta's 75th-percentile hardship cutoffs—24.5% poverty and 14.8% carlessness. 100% of our sites clear this standard, guaranteeing zero equity drift.</a:t>
+            </a:r>
+          </a:p>
+          <a:p>
+            <a:r>
+              <a:t>4. Pedestrian Isochrones over Radii: An 800m street walk network respects interstate and rail barriers that trap transit-dependent pedestrians."</a:t>
+            </a:r>
+          </a:p>
+          <a:p/>
+          <a:p>
+            <a:r>
+              <a:t>[1:40 - 2:10] SECTION 2b - PART C: CONSTRAINTS &amp; LIMITATIONS (30 SECONDS)</a:t>
+            </a:r>
+          </a:p>
+          <a:p>
+            <a:r>
+              <a:t>(Action: Open Explainability panel with ML.EXPLAIN_PREDICT feature bars)</a:t>
+            </a:r>
+          </a:p>
+          <a:p>
+            <a:r>
+              <a:t>"As an honest engineering team, we explicitly acknowledge our constraints:</a:t>
+            </a:r>
+          </a:p>
+          <a:p>
+            <a:r>
+              <a:t>First, our baseline relies on NOAA Heat Watch traverses, which capture a single representative hot day. Longitudinal seasonal data is required for multi-year wind patterns.</a:t>
+            </a:r>
+          </a:p>
+          <a:p>
+            <a:r>
+              <a:t>Second, long-term weather stations in Atlanta are clustered near airports, requiring spatial interpolation across urban core tracts.</a:t>
+            </a:r>
+          </a:p>
+          <a:p>
+            <a:r>
+              <a:t>And third, while ML.EXPLAIN_PREDICT diagnoses root causes—telling us canopy deficit adds +2.4°F and impervious asphalt adds +1.8°F—it cannot simulate post-planting counterfactual cooling without multi-year canopy growth data. We diagnose the cause; we don't falsely claim to simulate the tree's future."</a:t>
+            </a:r>
+          </a:p>
+          <a:p/>
+          <a:p>
+            <a:r>
+              <a:t>[2:10 - 2:40] SECTION 2b - PART D: ARCHITECTURE TOUR OF DEPLOYED PIECES (30 SECONDS)</a:t>
+            </a:r>
+          </a:p>
+          <a:p>
+            <a:r>
+              <a:t>(Action: Open AI Advisor tab, trigger a query, show sub-600ms latency and Cloud Run deployment)</a:t>
+            </a:r>
+          </a:p>
+          <a:p>
+            <a:r>
+              <a:t>"Here is the deployed architecture serving this experience:</a:t>
+            </a:r>
+          </a:p>
+          <a:p>
+            <a:r>
+              <a:t>At the top is Gemini 2.5 Flash on Vertex AI, orchestrated with Google ADK using 7 custom Python domain tools.</a:t>
+            </a:r>
+          </a:p>
+          <a:p>
+            <a:r>
+              <a:t>In the data layer, BigQuery ML powers heat_offset_model and ML.EXPLAIN_PREDICT directly inside Google Cloud.</a:t>
+            </a:r>
+          </a:p>
+          <a:p>
+            <a:r>
+              <a:t>The backend is deployed on serverless Google Cloud Run, serving our /run endpoint with sub-600ms latency.</a:t>
+            </a:r>
+          </a:p>
+          <a:p>
+            <a:r>
+              <a:t>And the frontend is built with React 18, TypeScript, and Leaflet GIS, providing an executive interface designed specifically for municipal planners."</a:t>
+            </a:r>
+          </a:p>
+          <a:p/>
+          <a:p>
+            <a:r>
+              <a:t>[AT 2:40 -&gt; SWITCH SCREEN-SHARE BACK TO SLIDE 2 FOR FINAL 20-SECOND OUTRO]</a:t>
             </a:r>
           </a:p>
         </p:txBody>
@@ -585,25 +787,199 @@
           <a:lstStyle/>
           <a:p>
             <a:r>
-              <a:t>=== SECTION 2c: 20-SECOND OUTRO (SLIDE 2 ON SCREEN) ===</a:t>
+              <a:t>=== SLIDE 2 PRESENTATION TALK TRACK &amp; VIDEO OUTRO ===</a:t>
             </a:r>
           </a:p>
           <a:p/>
           <a:p>
             <a:r>
-              <a:t>[AT 2:40, SWITCH BACK FROM LIVE DEMO TO SLIDE 2 FOR FINAL 20 SECONDS]</a:t>
+              <a:t>--- PART 1: SLIDE 2 WALKTHROUGH (FOR LIVE PITCH / TECHNICAL DEFENSE) ---</a:t>
+            </a:r>
+          </a:p>
+          <a:p>
+            <a:r>
+              <a:t>• Column 1: System Architecture Tour</a:t>
+            </a:r>
+          </a:p>
+          <a:p>
+            <a:r>
+              <a:t>  - Vertex AI &amp; Gemini 2.5 Flash: ADK runtime with isolated sessions, bounded spatial guards ([-84.55, 33.64] to [-84.28, 33.89]), and correlated telemetry spans.</a:t>
+            </a:r>
+          </a:p>
+          <a:p>
+            <a:r>
+              <a:t>  - BigQuery ML at the Core: heat_offset_model trained on NOAA Heat Watch + Census ACS. ML.EXPLAIN_PREDICT unpacks canopy deficits (+2.4°F) and impervious asphalt (+1.8°F).</a:t>
+            </a:r>
+          </a:p>
+          <a:p>
+            <a:r>
+              <a:t>  - Serverless Cloud Run &amp; Vertex ADC: Gen2 Cloud Run with GOOGLE_GENAI_USE_VERTEXAI=TRUE, native readiness polling, and zero client API keys.</a:t>
+            </a:r>
+          </a:p>
+          <a:p>
+            <a:r>
+              <a:t>  - Executive GIS Dashboard: React 18 + TypeScript + Leaflet with real-time 85°–105°F slider, 800m walk isochrones, and zero-key OSM tiles.</a:t>
+            </a:r>
+          </a:p>
+          <a:p>
+            <a:r>
+              <a:t>  - Vite Reverse Proxy: CORS-free /api/agent routing configured for Cloud Shell port 8080 evaluation.</a:t>
             </a:r>
           </a:p>
           <a:p/>
           <a:p>
             <a:r>
-              <a:t>"To wrap up: our advisor gives Atlanta leaders an actionable, defensible path across all three clocks. Tomorrow, we dispatch hydration vans to Sweet Auburn. This budget cycle, we fund 42 MARTA transit shade structures. And this decade, we target urban canopy planting at the bottom 20% tracts. By connecting BigQuery ML with street-level walkability and an uncompromising equity audit, we ensure no neighborhood is left behind. Thank you."</a:t>
+              <a:t>• Column 2: Defended Engineering Decisions</a:t>
+            </a:r>
+          </a:p>
+          <a:p>
+            <a:r>
+              <a:t>  1. Race/ethnicity excluded from model training to prevent self-fulfilling redlining proxies; equity enforced on post-hoc outcomes.</a:t>
+            </a:r>
+          </a:p>
+          <a:p>
+            <a:r>
+              <a:t>  2. Microclimate offsets modeled rather than raw ambient temperatures to isolate permanent built infrastructure from seasonal weather swings.</a:t>
+            </a:r>
+          </a:p>
+          <a:p>
+            <a:r>
+              <a:t>  3. Siting clearance benchmarked against Atlanta 75th-percentile hardship cutoffs (poverty &gt;= 24.5%, carless &gt;= 14.8%).</a:t>
+            </a:r>
+          </a:p>
+          <a:p>
+            <a:r>
+              <a:t>  4. 800m pedestrian walk networks replace circular Euclidean radii to respect highway and rail barriers.</a:t>
             </a:r>
           </a:p>
           <a:p/>
           <a:p>
             <a:r>
-              <a:t>=== TOTAL VIDEO RUNTIME: EXACTLY 3 MINUTES (0:20 + 2:20 + 0:20) ===</a:t>
+              <a:t>• Column 3: Honest Constraints &amp; Multi-Clock Roadmap</a:t>
+            </a:r>
+          </a:p>
+          <a:p>
+            <a:r>
+              <a:t>  - Constraint: Single-day NOAA traverse baseline; longitudinal multi-year calibration needed.</a:t>
+            </a:r>
+          </a:p>
+          <a:p>
+            <a:r>
+              <a:t>  - Constraint: Airport station clustering requires spatial interpolation across core tracts.</a:t>
+            </a:r>
+          </a:p>
+          <a:p>
+            <a:r>
+              <a:t>  - Constraint: Explanations isolate root causes but cannot simulate multi-year post-planting canopy growth.</a:t>
+            </a:r>
+          </a:p>
+          <a:p>
+            <a:r>
+              <a:t>  - Multi-Clock Action Plan: Today (hydration vans), This Budget Cycle (42 MARTA shade-sails), This Decade (urban forestry canopy in bottom 20% tracts).</a:t>
+            </a:r>
+          </a:p>
+          <a:p/>
+          <a:p>
+            <a:r>
+              <a:t>--- PART 2: VIDEO OUTRO TALK TRACK (EXACT TIMING: 2:40 - 3:00) ---</a:t>
+            </a:r>
+          </a:p>
+          <a:p/>
+          <a:p>
+            <a:r>
+              <a:t>[2:40 - 3:00] SECTION 2c: OUTRO &amp; MULTI-CLOCK ROADMAP (SLIDE 2 ON SCREEN - 20 SECONDS)</a:t>
+            </a:r>
+          </a:p>
+          <a:p>
+            <a:r>
+              <a:t>"To wrap up: our advisor gives Atlanta leaders an actionable, defensible path across all three clocks.</a:t>
+            </a:r>
+          </a:p>
+          <a:p>
+            <a:r>
+              <a:t>Tomorrow, emergency management can dispatch mobile hydration vans to Sweet Auburn.</a:t>
+            </a:r>
+          </a:p>
+          <a:p>
+            <a:r>
+              <a:t>This budget cycle, the city can fund 42 transit shade structures at unshaded MARTA stops inside our walk buffers.</a:t>
+            </a:r>
+          </a:p>
+          <a:p>
+            <a:r>
+              <a:t>And this decade, urban forestry can target canopy planting where it delivers the highest thermal relief per dollar.</a:t>
+            </a:r>
+          </a:p>
+          <a:p>
+            <a:r>
+              <a:t>By connecting BigQuery ML with street-level walkability and an uncompromising equity audit, we ensure no neighborhood is left behind. Thank you."</a:t>
+            </a:r>
+          </a:p>
+          <a:p/>
+          <a:p>
+            <a:r>
+              <a:t>--- PART 3: PRESENTER 3-MINUTE VIDEO TIMING CHEATSHEET ---</a:t>
+            </a:r>
+          </a:p>
+          <a:p>
+            <a:r>
+              <a:t>• 0:00 - 0:20 (20s): Intro &amp; Scenario Hook (Slide 1 Fullscreen)</a:t>
+            </a:r>
+          </a:p>
+          <a:p>
+            <a:r>
+              <a:t>• 0:20 - 1:05 (45s): Top 5 Capabilities (Live GIS Map Screen-Share)</a:t>
+            </a:r>
+          </a:p>
+          <a:p>
+            <a:r>
+              <a:t>• 1:05 - 1:40 (35s): Top 4 Defended Decisions (Live Equity Tab Screen-Share)</a:t>
+            </a:r>
+          </a:p>
+          <a:p>
+            <a:r>
+              <a:t>• 1:40 - 2:10 (30s): Constraints &amp; Honest Limitations (Explainability Panel)</a:t>
+            </a:r>
+          </a:p>
+          <a:p>
+            <a:r>
+              <a:t>• 2:10 - 2:40 (30s): Architecture Tour of Deployed Stack (AI Advisor Query &amp; Cloud Run)</a:t>
+            </a:r>
+          </a:p>
+          <a:p>
+            <a:r>
+              <a:t>• 2:40 - 3:00 (20s): Multi-Clock Roadmap &amp; Outro (Slide 2 Fullscreen)</a:t>
+            </a:r>
+          </a:p>
+          <a:p>
+            <a:r>
+              <a:t>TOTAL DURATION: EXACTLY 180 SECONDS (3 MINUTES)</a:t>
+            </a:r>
+          </a:p>
+          <a:p/>
+          <a:p>
+            <a:r>
+              <a:t>--- PART 4: JUDGING CRITERIA CROSSWALK ---</a:t>
+            </a:r>
+          </a:p>
+          <a:p>
+            <a:r>
+              <a:t>• Impact (30%): Siting shelters 19,850 high-risk residents; 10-minute walk buffers prioritize transit-dependent families.</a:t>
+            </a:r>
+          </a:p>
+          <a:p>
+            <a:r>
+              <a:t>• Execution (30%): Live Cloud Run service, Vertex AI ADK agent, React 18 frontend, sub-600ms latency, zero CORS.</a:t>
+            </a:r>
+          </a:p>
+          <a:p>
+            <a:r>
+              <a:t>• Rigor &amp; Judgment (25%): Race excluded from features, 75th percentile equity benchmarking, explicit constraint honesty.</a:t>
+            </a:r>
+          </a:p>
+          <a:p>
+            <a:r>
+              <a:t>• Craft (15%): Production UI, clean presentation deck, responsive map, 1-click City Council legislative memo.</a:t>
             </a:r>
           </a:p>
         </p:txBody>
@@ -4781,7 +5157,7 @@
               </a:defRPr>
             </a:pPr>
             <a:r>
-              <a:t>AngelHack / Google A4I Challenge 1  •  GitHub: agustincori/A4I2026-challenge-1-walkability  •  Cloud Run: atlanta-heat-advisor.a.run.app</a:t>
+              <a:t>AngelHack / Google A4I Challenge 1  •  GitHub: agustincori/A4I2026-challenge-1-walkability  •  Cloud Run: atlanta-heat-advisor-frontend-1004921377034.us-central1.run.app</a:t>
             </a:r>
           </a:p>
         </p:txBody>
@@ -5048,7 +5424,7 @@
                   <a:srgbClr val="202124"/>
                 </a:solidFill>
               </a:rPr>
-              <a:t>React 19 + TS + Leaflet with 85°–105°F microclimate slider, 800m isochrones, and zero-key OSM tiles.</a:t>
+              <a:t>React 18 + TS + Leaflet with 85°–105°F microclimate slider, 800m isochrones, and zero-key OSM tiles.</a:t>
             </a:r>
           </a:p>
           <a:p>

--- a/docs/Atlanta_Heat_Resilience_2_Slide_Deck.pptx
+++ b/docs/Atlanta_Heat_Resilience_2_Slide_Deck.pptx
@@ -793,61 +793,19 @@
           </a:bodyPr>
           <a:lstStyle/>
           <a:p>
+            <a:pPr indent="0" lvl="0" marL="0" rtl="0" algn="l">
+              <a:spcBef>
+                <a:spcPts val="0"/>
+              </a:spcBef>
+              <a:spcAft>
+                <a:spcPts val="0"/>
+              </a:spcAft>
+              <a:buNone/>
+            </a:pPr>
             <a:r>
-              <a:t>=== SUBMISSION INSTRUCTIONS &amp; COMPETITION CHECKLIST ===</a:t>
+              <a:t/>
             </a:r>
-          </a:p>
-          <a:p/>
-          <a:p>
-            <a:r>
-              <a:t>Official Template: ATL-6 - Google Slides</a:t>
-            </a:r>
-          </a:p>
-          <a:p>
-            <a:r>
-              <a:t>Team ID: ATL-6</a:t>
-            </a:r>
-          </a:p>
-          <a:p>
-            <a:r>
-              <a:t>Challenge 1: Community Climate Resilience (Urban Heat Track)</a:t>
-            </a:r>
-          </a:p>
-          <a:p>
-            <a:r>
-              <a:t>Track: This Budget Cycle (Cooling Center Siting &amp; Infrastructure Investment)</a:t>
-            </a:r>
-          </a:p>
-          <a:p/>
-          <a:p>
-            <a:r>
-              <a:t>Submission Checklist:</a:t>
-            </a:r>
-          </a:p>
-          <a:p>
-            <a:r>
-              <a:t>1. Squad Environment Link: Deployed Cloud Run Agent API &amp; React 18 GIS Dashboard</a:t>
-            </a:r>
-          </a:p>
-          <a:p>
-            <a:r>
-              <a:t>2. Live App / Demo Link: https://atlanta-heat-advisor-frontend-1004921377034.us-central1.run.app</a:t>
-            </a:r>
-          </a:p>
-          <a:p>
-            <a:r>
-              <a:t>3. GitHub Repository: https://github.com/agustincori/A4I2026-challenge-1-walkability</a:t>
-            </a:r>
-          </a:p>
-          <a:p>
-            <a:r>
-              <a:t>4. Recorded Pitch Video: Exactly 3 minutes (0:20 intro, 2:20 demo, 0:20 outro)</a:t>
-            </a:r>
-          </a:p>
-          <a:p>
-            <a:r>
-              <a:t>5. Pitch Deck: 6 required submission slides (Slides 2-7 completely filled out)</a:t>
-            </a:r>
+            <a:endParaRPr/>
           </a:p>
         </p:txBody>
       </p:sp>
@@ -934,51 +892,19 @@
           </a:bodyPr>
           <a:lstStyle/>
           <a:p>
+            <a:pPr indent="0" lvl="0" marL="0" rtl="0" algn="l">
+              <a:spcBef>
+                <a:spcPts val="0"/>
+              </a:spcBef>
+              <a:spcAft>
+                <a:spcPts val="0"/>
+              </a:spcAft>
+              <a:buNone/>
+            </a:pPr>
             <a:r>
-              <a:t>=== SLIDE 2: TITLE &amp; TEAM IDENTIFICATION ===</a:t>
+              <a:t/>
             </a:r>
-          </a:p>
-          <a:p/>
-          <a:p>
-            <a:r>
-              <a:t>Team: ATL-6</a:t>
-            </a:r>
-          </a:p>
-          <a:p>
-            <a:r>
-              <a:t>Solution: Atlanta Urban Climate Resilience &amp; Walkability Advisor</a:t>
-            </a:r>
-          </a:p>
-          <a:p>
-            <a:r>
-              <a:t>Challenge 1: Urban Heat Track (Target Municipality: Atlanta, GA)</a:t>
-            </a:r>
-          </a:p>
-          <a:p>
-            <a:r>
-              <a:t>Live Deployed Dashboard: https://atlanta-heat-advisor-frontend-1004921377034.us-central1.run.app</a:t>
-            </a:r>
-          </a:p>
-          <a:p>
-            <a:r>
-              <a:t>Cloud Run Agent API: https://atlanta-heat-advisor-1004921377034.us-central1.run.app</a:t>
-            </a:r>
-          </a:p>
-          <a:p>
-            <a:r>
-              <a:t>GitHub Repository: https://github.com/agustincori/A4I2026-challenge-1-walkability</a:t>
-            </a:r>
-          </a:p>
-          <a:p/>
-          <a:p>
-            <a:r>
-              <a:t>--- VIDEO WALKTHROUGH INTRO (0:00 - 0:20) ---</a:t>
-            </a:r>
-          </a:p>
-          <a:p>
-            <a:r>
-              <a:t>"Good afternoon, judges. When a heat advisory hits Atlanta, news reports quote KATL Airport: 95°F. But in dense neighborhoods like Sweet Auburn and Peoplestown, microclimates run up to 4.8 degrees hotter. Over 47% of households there have no car, and tree canopy drops below 33%. For Challenge 1's budget track, Dana in the City Manager's office must site 3 permanent cooling centers before tomorrow's 9 AM City Council session. We built the Atlanta Urban Climate Resilience Advisor to solve this with BigQuery ML, pedestrian walk buffers, and an equity audit. Let's see the live tool in action."</a:t>
-            </a:r>
+            <a:endParaRPr/>
           </a:p>
         </p:txBody>
       </p:sp>
@@ -1065,30 +991,19 @@
           </a:bodyPr>
           <a:lstStyle/>
           <a:p>
+            <a:pPr indent="0" lvl="0" marL="0" rtl="0" algn="l">
+              <a:spcBef>
+                <a:spcPts val="0"/>
+              </a:spcBef>
+              <a:spcAft>
+                <a:spcPts val="0"/>
+              </a:spcAft>
+              <a:buNone/>
+            </a:pPr>
             <a:r>
-              <a:t>=== SLIDE 3: TEAM &amp; FILMING AVAILABILITY ===</a:t>
+              <a:t/>
             </a:r>
-          </a:p>
-          <a:p/>
-          <a:p>
-            <a:r>
-              <a:t>Team ID: ATL-6</a:t>
-            </a:r>
-          </a:p>
-          <a:p>
-            <a:r>
-              <a:t>Members: Agustin Corigliano (pagustincorigliano@gmail.com), tshuggler (tshuggler@gmail.com)</a:t>
-            </a:r>
-          </a:p>
-          <a:p>
-            <a:r>
-              <a:t>Filming Availability: Both team members confirm availability to return to Coca-Cola Roxy between 1:00-4:00 PM on Thursday 10/29.</a:t>
-            </a:r>
-          </a:p>
-          <a:p>
-            <a:r>
-              <a:t>Project Sharing: YES - Authorized to share with employer and community partners.</a:t>
-            </a:r>
+            <a:endParaRPr/>
           </a:p>
         </p:txBody>
       </p:sp>
@@ -1175,35 +1090,19 @@
           </a:bodyPr>
           <a:lstStyle/>
           <a:p>
+            <a:pPr indent="0" lvl="0" marL="0" rtl="0" algn="l">
+              <a:spcBef>
+                <a:spcPts val="0"/>
+              </a:spcBef>
+              <a:spcAft>
+                <a:spcPts val="0"/>
+              </a:spcAft>
+              <a:buNone/>
+            </a:pPr>
             <a:r>
-              <a:t>=== SLIDE 4: REAL-WORLD CHALLENGE &amp; SOCIETAL IMPACT ===</a:t>
+              <a:t/>
             </a:r>
-          </a:p>
-          <a:p/>
-          <a:p>
-            <a:r>
-              <a:t>Key Talking Points:</a:t>
-            </a:r>
-          </a:p>
-          <a:p>
-            <a:r>
-              <a:t>1. Airport vs. Street Disparity: Airport readings (95°F) fail to warn residents in asphalt corridors experiencing 99.8°F.</a:t>
-            </a:r>
-          </a:p>
-          <a:p>
-            <a:r>
-              <a:t>2. Transit Dependence: Over 47% of families in Sweet Auburn and Peoplestown do not own cars. Traditional 3-mile regional facilities leave them stranded.</a:t>
-            </a:r>
-          </a:p>
-          <a:p>
-            <a:r>
-              <a:t>3. The Decision Scenario: Dana in the City Manager's Office has $1.2M capital funding and must deliver an unimpeachable council memo by 9:00 AM tomorrow.</a:t>
-            </a:r>
-          </a:p>
-          <a:p>
-            <a:r>
-              <a:t>4. Societal Benefit: Grounding decisions in street-level data ensures public investments flow to historically disinvested, high-vulnerability neighborhoods.</a:t>
-            </a:r>
+            <a:endParaRPr/>
           </a:p>
         </p:txBody>
       </p:sp>
@@ -1290,35 +1189,19 @@
           </a:bodyPr>
           <a:lstStyle/>
           <a:p>
+            <a:pPr indent="0" lvl="0" marL="0" rtl="0" algn="l">
+              <a:spcBef>
+                <a:spcPts val="0"/>
+              </a:spcBef>
+              <a:spcAft>
+                <a:spcPts val="0"/>
+              </a:spcAft>
+              <a:buNone/>
+            </a:pPr>
             <a:r>
-              <a:t>=== SLIDE 5: OUR AGENT &amp; TANGIBLE OUTCOMES ===</a:t>
+              <a:t/>
             </a:r>
-          </a:p>
-          <a:p/>
-          <a:p>
-            <a:r>
-              <a:t>Live Demo Talking Points (0:20 - 1:40):</a:t>
-            </a:r>
-          </a:p>
-          <a:p>
-            <a:r>
-              <a:t>1. Natural Language Interface: Planners talk in street names; the cognitive planner handles geocoding, BQML tool execution, and equity auditing.</a:t>
-            </a:r>
-          </a:p>
-          <a:p>
-            <a:r>
-              <a:t>2. Pedestrian Isochrones: Blue 800-meter walk rings model true sidewalk accessibility rather than naive radial buffers.</a:t>
-            </a:r>
-          </a:p>
-          <a:p>
-            <a:r>
-              <a:t>3. 100% Equity Compliance: Sweet Auburn, South Pryor, and Mechanicsville all exceed the 75th percentile city hardship cutoffs.</a:t>
-            </a:r>
-          </a:p>
-          <a:p>
-            <a:r>
-              <a:t>4. Immediate Policy Adoption: 1-click Council Memo generator eliminates hours of administrative drafting ahead of tomorrow's 9 AM vote.</a:t>
-            </a:r>
+            <a:endParaRPr/>
           </a:p>
         </p:txBody>
       </p:sp>
@@ -1405,30 +1288,19 @@
           </a:bodyPr>
           <a:lstStyle/>
           <a:p>
+            <a:pPr indent="0" lvl="0" marL="0" rtl="0" algn="l">
+              <a:spcBef>
+                <a:spcPts val="0"/>
+              </a:spcBef>
+              <a:spcAft>
+                <a:spcPts val="0"/>
+              </a:spcAft>
+              <a:buNone/>
+            </a:pPr>
             <a:r>
-              <a:t>=== SLIDE 6: DATA ECOSYSTEM &amp; ETHICAL RIGOR ===</a:t>
+              <a:t/>
             </a:r>
-          </a:p>
-          <a:p/>
-          <a:p>
-            <a:r>
-              <a:t>Technical Rigor &amp; Limitations (1:40 - 2:10):</a:t>
-            </a:r>
-          </a:p>
-          <a:p>
-            <a:r>
-              <a:t>1. Offset vs Raw Temp: Predicting thermal offset isolates permanent urban fabric from day-to-day weather fluctuations.</a:t>
-            </a:r>
-          </a:p>
-          <a:p>
-            <a:r>
-              <a:t>2. Bias Exclusion: Strict exclusion of race/ethnicity in training features prevents machine learning from codifying historical segregation.</a:t>
-            </a:r>
-          </a:p>
-          <a:p>
-            <a:r>
-              <a:t>3. Honest Constraints: NOAA Heat Watch captures one representative summer day; multi-year variance requires longitudinal satellite calibration. We diagnose root causes (+2.4°F canopy deficit), but do not claim to simulate future tree growth without biological models.</a:t>
-            </a:r>
+            <a:endParaRPr/>
           </a:p>
         </p:txBody>
       </p:sp>
@@ -1515,46 +1387,19 @@
           </a:bodyPr>
           <a:lstStyle/>
           <a:p>
+            <a:pPr indent="0" lvl="0" marL="0" rtl="0" algn="l">
+              <a:spcBef>
+                <a:spcPts val="0"/>
+              </a:spcBef>
+              <a:spcAft>
+                <a:spcPts val="0"/>
+              </a:spcAft>
+              <a:buNone/>
+            </a:pPr>
             <a:r>
-              <a:t>=== SLIDE 7: ARCHITECTURE TOUR &amp; 3-CLOCK OUTRO ===</a:t>
+              <a:t/>
             </a:r>
-          </a:p>
-          <a:p/>
-          <a:p>
-            <a:r>
-              <a:t>Architecture Tour (2:10 - 2:40):</a:t>
-            </a:r>
-          </a:p>
-          <a:p>
-            <a:r>
-              <a:t>• Gemini 2.5 Flash on Vertex AI via Google ADK runtime.</a:t>
-            </a:r>
-          </a:p>
-          <a:p>
-            <a:r>
-              <a:t>• BigQuery ML heat_offset_model running in Google Cloud data plane.</a:t>
-            </a:r>
-          </a:p>
-          <a:p>
-            <a:r>
-              <a:t>• Serverless Cloud Run endpoint live at atlanta-heat-advisor-1004921377034.us-central1.run.app.</a:t>
-            </a:r>
-          </a:p>
-          <a:p>
-            <a:r>
-              <a:t>• React 18 + Leaflet GIS dashboard with zero CORS errors via Vite proxy.</a:t>
-            </a:r>
-          </a:p>
-          <a:p/>
-          <a:p>
-            <a:r>
-              <a:t>20-Second Outro (2:40 - 3:00):</a:t>
-            </a:r>
-          </a:p>
-          <a:p>
-            <a:r>
-              <a:t>"To wrap up: our advisor gives Atlanta leaders an actionable, defensible path across all three clocks. Tomorrow, emergency hydration vans to Sweet Auburn. This budget cycle, 42 MARTA transit shade structures. And this decade, urban canopy planting at the bottom 20% tracts. By connecting BigQuery ML with street-level walkability and an uncompromising equity audit, we ensure no neighborhood is left behind. Thank you."</a:t>
-            </a:r>
+            <a:endParaRPr/>
           </a:p>
         </p:txBody>
       </p:sp>
@@ -11656,61 +11501,15 @@
           </a:bodyPr>
           <a:lstStyle/>
           <a:p>
-            <a:pPr indent="0" lvl="0" marL="0" rtl="0" algn="ctr">
-              <a:lnSpc>
-                <a:spcPct val="90000"/>
-              </a:lnSpc>
-              <a:spcBef>
-                <a:spcPts val="0"/>
-              </a:spcBef>
-              <a:spcAft>
-                <a:spcPts val="0"/>
-              </a:spcAft>
-              <a:buNone/>
+            <a:pPr algn="l">
               <a:defRPr sz="2800" b="1">
                 <a:solidFill>
-                  <a:srgbClr val="202124"/>
+                  <a:srgbClr val="FFFFFF"/>
                 </a:solidFill>
-                <a:latin typeface="Google Sans Flex Medium"/>
               </a:defRPr>
             </a:pPr>
             <a:r>
-              <a:t>ATL-6</a:t>
-            </a:r>
-            <a:endParaRPr sz="2400">
-              <a:solidFill>
-                <a:schemeClr val="lt1"/>
-              </a:solidFill>
-              <a:latin typeface="Google Sans Flex Medium"/>
-              <a:ea typeface="Google Sans Flex Medium"/>
-              <a:cs typeface="Google Sans Flex Medium"/>
-              <a:sym typeface="Google Sans Flex Medium"/>
-            </a:endParaRPr>
-          </a:p>
-          <a:p>
-            <a:pPr>
-              <a:defRPr sz="1300" b="1">
-                <a:solidFill>
-                  <a:srgbClr val="1A73E8"/>
-                </a:solidFill>
-                <a:latin typeface="Google Sans Flex"/>
-              </a:defRPr>
-            </a:pPr>
-            <a:r>
-              <a:t>Atlanta Urban Climate Resilience Advisor</a:t>
-            </a:r>
-          </a:p>
-          <a:p>
-            <a:pPr>
-              <a:defRPr sz="1000">
-                <a:solidFill>
-                  <a:srgbClr val="5F6368"/>
-                </a:solidFill>
-                <a:latin typeface="Google Sans Flex"/>
-              </a:defRPr>
-            </a:pPr>
-            <a:r>
-              <a:t>Challenge 1: Urban Heat • Track: This Budget Cycle</a:t>
+              <a:t>Cooling Hotlanta</a:t>
             </a:r>
           </a:p>
         </p:txBody>
@@ -11742,65 +11541,6 @@
           </a:ln>
         </p:spPr>
       </p:pic>
-      <p:sp>
-        <p:nvSpPr>
-          <p:cNvPr id="121" name="TextBox 120"/>
-          <p:cNvSpPr txBox="1"/>
-          <p:nvPr/>
-        </p:nvSpPr>
-        <p:spPr>
-          <a:xfrm>
-            <a:off x="3584448" y="3611880"/>
-            <a:ext cx="5120640" cy="1097280"/>
-          </a:xfrm>
-          <a:prstGeom prst="rect">
-            <a:avLst/>
-          </a:prstGeom>
-          <a:noFill/>
-        </p:spPr>
-        <p:txBody>
-          <a:bodyPr wrap="square">
-            <a:spAutoFit/>
-          </a:bodyPr>
-          <a:lstStyle/>
-          <a:p>
-            <a:pPr>
-              <a:defRPr sz="900">
-                <a:solidFill>
-                  <a:srgbClr val="202124"/>
-                </a:solidFill>
-              </a:defRPr>
-            </a:pPr>
-            <a:r>
-              <a:t>• Live Dashboard: atlanta-heat-advisor-frontend-1004921377034.us-central1.run.app</a:t>
-            </a:r>
-          </a:p>
-          <a:p>
-            <a:pPr>
-              <a:defRPr sz="900">
-                <a:solidFill>
-                  <a:srgbClr val="202124"/>
-                </a:solidFill>
-              </a:defRPr>
-            </a:pPr>
-            <a:r>
-              <a:t>• Agent API (Cloud Run): atlanta-heat-advisor-1004921377034.us-central1.run.app</a:t>
-            </a:r>
-          </a:p>
-          <a:p>
-            <a:pPr>
-              <a:defRPr sz="900">
-                <a:solidFill>
-                  <a:srgbClr val="202124"/>
-                </a:solidFill>
-              </a:defRPr>
-            </a:pPr>
-            <a:r>
-              <a:t>• GitHub: github.com/agustincori/A4I2026-challenge-1-walkability</a:t>
-            </a:r>
-          </a:p>
-        </p:txBody>
-      </p:sp>
     </p:spTree>
   </p:cSld>
   <p:clrMapOvr>
@@ -12417,12 +12157,14 @@
                     <a:lstStyle/>
                     <a:p>
                       <a:pPr>
-                        <a:defRPr sz="850">
-                          <a:latin typeface="Google Sans Flex"/>
+                        <a:defRPr sz="950">
+                          <a:solidFill>
+                            <a:srgbClr val="FFFFFF"/>
+                          </a:solidFill>
                         </a:defRPr>
                       </a:pPr>
                       <a:r>
-                        <a:t>Agustin Corigliano</a:t>
+                        <a:t>Tanya Huggler</a:t>
                       </a:r>
                     </a:p>
                   </a:txBody>
@@ -12471,12 +12213,14 @@
                     <a:lstStyle/>
                     <a:p>
                       <a:pPr>
-                        <a:defRPr sz="850">
-                          <a:latin typeface="Google Sans Flex"/>
+                        <a:defRPr sz="950">
+                          <a:solidFill>
+                            <a:srgbClr val="FFFFFF"/>
+                          </a:solidFill>
                         </a:defRPr>
                       </a:pPr>
                       <a:r>
-                        <a:t>pagustincorigliano@gmail.com</a:t>
+                        <a:t>tanya.huggler@coxautoinc.com</a:t>
                       </a:r>
                     </a:p>
                   </a:txBody>
@@ -12525,12 +12269,14 @@
                     <a:lstStyle/>
                     <a:p>
                       <a:pPr>
-                        <a:defRPr sz="850">
-                          <a:latin typeface="Google Sans Flex"/>
+                        <a:defRPr sz="950">
+                          <a:solidFill>
+                            <a:srgbClr val="FFFFFF"/>
+                          </a:solidFill>
                         </a:defRPr>
                       </a:pPr>
                       <a:r>
-                        <a:t>[On File / Discord]</a:t>
+                        <a:t>518-542-5335</a:t>
                       </a:r>
                     </a:p>
                   </a:txBody>
@@ -12579,12 +12325,14 @@
                     <a:lstStyle/>
                     <a:p>
                       <a:pPr>
-                        <a:defRPr sz="850">
-                          <a:latin typeface="Google Sans Flex"/>
+                        <a:defRPr sz="950">
+                          <a:solidFill>
+                            <a:srgbClr val="FFFFFF"/>
+                          </a:solidFill>
                         </a:defRPr>
                       </a:pPr>
                       <a:r>
-                        <a:t>Yes (1:00-4:00 PM on 10/29)</a:t>
+                        <a:t>1:00</a:t>
                       </a:r>
                     </a:p>
                   </a:txBody>
@@ -12633,13 +12381,12 @@
                     <a:lstStyle/>
                     <a:p>
                       <a:pPr>
-                        <a:defRPr sz="850">
-                          <a:latin typeface="Google Sans Flex"/>
+                        <a:defRPr sz="950">
+                          <a:solidFill>
+                            <a:srgbClr val="FFFFFF"/>
+                          </a:solidFill>
                         </a:defRPr>
                       </a:pPr>
-                      <a:r>
-                        <a:t>Yes</a:t>
-                      </a:r>
                     </a:p>
                   </a:txBody>
                   <a:tcPr marT="19050" marB="19050" marR="28575" marL="28575">
@@ -12687,13 +12434,12 @@
                     <a:lstStyle/>
                     <a:p>
                       <a:pPr>
-                        <a:defRPr sz="850">
-                          <a:latin typeface="Google Sans Flex"/>
+                        <a:defRPr sz="950">
+                          <a:solidFill>
+                            <a:srgbClr val="FFFFFF"/>
+                          </a:solidFill>
                         </a:defRPr>
                       </a:pPr>
-                      <a:r>
-                        <a:t>team@agentsforimpact.org</a:t>
-                      </a:r>
                     </a:p>
                   </a:txBody>
                   <a:tcPr marT="91425" marB="91425" marR="91425" marL="91425">
@@ -12743,12 +12489,14 @@
                     <a:lstStyle/>
                     <a:p>
                       <a:pPr>
-                        <a:defRPr sz="850">
-                          <a:latin typeface="Google Sans Flex"/>
+                        <a:defRPr sz="950">
+                          <a:solidFill>
+                            <a:srgbClr val="FFFFFF"/>
+                          </a:solidFill>
                         </a:defRPr>
                       </a:pPr>
                       <a:r>
-                        <a:t>tshuggler</a:t>
+                        <a:t>Agustin Corigliano</a:t>
                       </a:r>
                     </a:p>
                   </a:txBody>
@@ -12797,12 +12545,14 @@
                     <a:lstStyle/>
                     <a:p>
                       <a:pPr>
-                        <a:defRPr sz="850">
-                          <a:latin typeface="Google Sans Flex"/>
+                        <a:defRPr sz="950">
+                          <a:solidFill>
+                            <a:srgbClr val="FFFFFF"/>
+                          </a:solidFill>
                         </a:defRPr>
                       </a:pPr>
                       <a:r>
-                        <a:t>tshuggler@gmail.com</a:t>
+                        <a:t>pagustincorigliano@gmail.com</a:t>
                       </a:r>
                     </a:p>
                   </a:txBody>
@@ -12851,12 +12601,14 @@
                     <a:lstStyle/>
                     <a:p>
                       <a:pPr>
-                        <a:defRPr sz="850">
-                          <a:latin typeface="Google Sans Flex"/>
+                        <a:defRPr sz="950">
+                          <a:solidFill>
+                            <a:srgbClr val="FFFFFF"/>
+                          </a:solidFill>
                         </a:defRPr>
                       </a:pPr>
                       <a:r>
-                        <a:t>[On File / Discord]</a:t>
+                        <a:t>786-721-3109</a:t>
                       </a:r>
                     </a:p>
                   </a:txBody>
@@ -12905,12 +12657,14 @@
                     <a:lstStyle/>
                     <a:p>
                       <a:pPr>
-                        <a:defRPr sz="850">
-                          <a:latin typeface="Google Sans Flex"/>
+                        <a:defRPr sz="950">
+                          <a:solidFill>
+                            <a:srgbClr val="FFFFFF"/>
+                          </a:solidFill>
                         </a:defRPr>
                       </a:pPr>
                       <a:r>
-                        <a:t>Yes (1:00-4:00 PM on 10/29)</a:t>
+                        <a:t>1:00</a:t>
                       </a:r>
                     </a:p>
                   </a:txBody>
@@ -12959,13 +12713,12 @@
                     <a:lstStyle/>
                     <a:p>
                       <a:pPr>
-                        <a:defRPr sz="850">
-                          <a:latin typeface="Google Sans Flex"/>
+                        <a:defRPr sz="950">
+                          <a:solidFill>
+                            <a:srgbClr val="FFFFFF"/>
+                          </a:solidFill>
                         </a:defRPr>
                       </a:pPr>
-                      <a:r>
-                        <a:t>Yes</a:t>
-                      </a:r>
                     </a:p>
                   </a:txBody>
                   <a:tcPr marT="19050" marB="19050" marR="28575" marL="28575">
@@ -13013,13 +12766,12 @@
                     <a:lstStyle/>
                     <a:p>
                       <a:pPr>
-                        <a:defRPr sz="850">
-                          <a:latin typeface="Google Sans Flex"/>
+                        <a:defRPr sz="950">
+                          <a:solidFill>
+                            <a:srgbClr val="FFFFFF"/>
+                          </a:solidFill>
                         </a:defRPr>
                       </a:pPr>
-                      <a:r>
-                        <a:t>team@agentsforimpact.org</a:t>
-                      </a:r>
                     </a:p>
                   </a:txBody>
                   <a:tcPr marT="91425" marB="91425" marR="91425" marL="91425">
@@ -13068,19 +12820,16 @@
                     <a:bodyPr/>
                     <a:lstStyle/>
                     <a:p>
-                      <a:pPr indent="0" lvl="0" marL="0" rtl="0" algn="l">
-                        <a:spcBef>
-                          <a:spcPts val="0"/>
-                        </a:spcBef>
-                        <a:spcAft>
-                          <a:spcPts val="0"/>
-                        </a:spcAft>
-                        <a:buNone/>
+                      <a:pPr>
+                        <a:defRPr sz="950">
+                          <a:solidFill>
+                            <a:srgbClr val="FFFFFF"/>
+                          </a:solidFill>
+                        </a:defRPr>
                       </a:pPr>
                       <a:r>
-                        <a:t/>
+                        <a:t>Joel Metuge</a:t>
                       </a:r>
-                      <a:endParaRPr/>
                     </a:p>
                   </a:txBody>
                   <a:tcPr marT="91425" marB="91425" marR="91425" marL="91425">
@@ -13127,19 +12876,16 @@
                     <a:bodyPr/>
                     <a:lstStyle/>
                     <a:p>
-                      <a:pPr indent="0" lvl="0" marL="0" rtl="0" algn="l">
-                        <a:spcBef>
-                          <a:spcPts val="0"/>
-                        </a:spcBef>
-                        <a:spcAft>
-                          <a:spcPts val="0"/>
-                        </a:spcAft>
-                        <a:buNone/>
+                      <a:pPr>
+                        <a:defRPr sz="950">
+                          <a:solidFill>
+                            <a:srgbClr val="FFFFFF"/>
+                          </a:solidFill>
+                        </a:defRPr>
                       </a:pPr>
                       <a:r>
-                        <a:t/>
+                        <a:t>joelmetuge0707@gmail.com</a:t>
                       </a:r>
-                      <a:endParaRPr/>
                     </a:p>
                   </a:txBody>
                   <a:tcPr marT="91425" marB="91425" marR="91425" marL="91425">
@@ -13186,19 +12932,16 @@
                     <a:bodyPr/>
                     <a:lstStyle/>
                     <a:p>
-                      <a:pPr indent="0" lvl="0" marL="0" rtl="0" algn="l">
-                        <a:spcBef>
-                          <a:spcPts val="0"/>
-                        </a:spcBef>
-                        <a:spcAft>
-                          <a:spcPts val="0"/>
-                        </a:spcAft>
-                        <a:buNone/>
+                      <a:pPr>
+                        <a:defRPr sz="950">
+                          <a:solidFill>
+                            <a:srgbClr val="FFFFFF"/>
+                          </a:solidFill>
+                        </a:defRPr>
                       </a:pPr>
                       <a:r>
-                        <a:t/>
+                        <a:t>256-797-2970</a:t>
                       </a:r>
-                      <a:endParaRPr/>
                     </a:p>
                   </a:txBody>
                   <a:tcPr marT="91425" marB="91425" marR="91425" marL="91425">
@@ -13245,23 +12988,16 @@
                     <a:bodyPr/>
                     <a:lstStyle/>
                     <a:p>
-                      <a:pPr indent="0" lvl="0" marL="0" rtl="0" algn="l">
-                        <a:spcBef>
-                          <a:spcPts val="0"/>
-                        </a:spcBef>
-                        <a:spcAft>
-                          <a:spcPts val="0"/>
-                        </a:spcAft>
-                        <a:buNone/>
+                      <a:pPr>
+                        <a:defRPr sz="950">
+                          <a:solidFill>
+                            <a:srgbClr val="FFFFFF"/>
+                          </a:solidFill>
+                        </a:defRPr>
                       </a:pPr>
                       <a:r>
-                        <a:t/>
+                        <a:t>1:00</a:t>
                       </a:r>
-                      <a:endParaRPr>
-                        <a:solidFill>
-                          <a:schemeClr val="lt1"/>
-                        </a:solidFill>
-                      </a:endParaRPr>
                     </a:p>
                   </a:txBody>
                   <a:tcPr marT="19050" marB="19050" marR="28575" marL="28575">
@@ -13308,23 +13044,13 @@
                     <a:bodyPr/>
                     <a:lstStyle/>
                     <a:p>
-                      <a:pPr indent="0" lvl="0" marL="0" rtl="0" algn="l">
-                        <a:spcBef>
-                          <a:spcPts val="0"/>
-                        </a:spcBef>
-                        <a:spcAft>
-                          <a:spcPts val="0"/>
-                        </a:spcAft>
-                        <a:buNone/>
+                      <a:pPr>
+                        <a:defRPr sz="950">
+                          <a:solidFill>
+                            <a:srgbClr val="FFFFFF"/>
+                          </a:solidFill>
+                        </a:defRPr>
                       </a:pPr>
-                      <a:r>
-                        <a:t/>
-                      </a:r>
-                      <a:endParaRPr>
-                        <a:solidFill>
-                          <a:schemeClr val="lt1"/>
-                        </a:solidFill>
-                      </a:endParaRPr>
                     </a:p>
                   </a:txBody>
                   <a:tcPr marT="19050" marB="19050" marR="28575" marL="28575">
@@ -13371,19 +13097,13 @@
                     <a:bodyPr/>
                     <a:lstStyle/>
                     <a:p>
-                      <a:pPr indent="0" lvl="0" marL="0" rtl="0" algn="l">
-                        <a:spcBef>
-                          <a:spcPts val="0"/>
-                        </a:spcBef>
-                        <a:spcAft>
-                          <a:spcPts val="0"/>
-                        </a:spcAft>
-                        <a:buNone/>
+                      <a:pPr>
+                        <a:defRPr sz="950">
+                          <a:solidFill>
+                            <a:srgbClr val="FFFFFF"/>
+                          </a:solidFill>
+                        </a:defRPr>
                       </a:pPr>
-                      <a:r>
-                        <a:t/>
-                      </a:r>
-                      <a:endParaRPr/>
                     </a:p>
                   </a:txBody>
                   <a:tcPr marT="91425" marB="91425" marR="91425" marL="91425">
@@ -13432,19 +13152,16 @@
                     <a:bodyPr/>
                     <a:lstStyle/>
                     <a:p>
-                      <a:pPr indent="0" lvl="0" marL="0" rtl="0" algn="l">
-                        <a:spcBef>
-                          <a:spcPts val="0"/>
-                        </a:spcBef>
-                        <a:spcAft>
-                          <a:spcPts val="0"/>
-                        </a:spcAft>
-                        <a:buNone/>
+                      <a:pPr>
+                        <a:defRPr sz="950">
+                          <a:solidFill>
+                            <a:srgbClr val="FFFFFF"/>
+                          </a:solidFill>
+                        </a:defRPr>
                       </a:pPr>
                       <a:r>
-                        <a:t/>
+                        <a:t>David Ballagh</a:t>
                       </a:r>
-                      <a:endParaRPr/>
                     </a:p>
                   </a:txBody>
                   <a:tcPr marT="91425" marB="91425" marR="91425" marL="91425">
@@ -13491,19 +13208,16 @@
                     <a:bodyPr/>
                     <a:lstStyle/>
                     <a:p>
-                      <a:pPr indent="0" lvl="0" marL="0" rtl="0" algn="l">
-                        <a:spcBef>
-                          <a:spcPts val="0"/>
-                        </a:spcBef>
-                        <a:spcAft>
-                          <a:spcPts val="0"/>
-                        </a:spcAft>
-                        <a:buNone/>
+                      <a:pPr>
+                        <a:defRPr sz="950">
+                          <a:solidFill>
+                            <a:srgbClr val="FFFFFF"/>
+                          </a:solidFill>
+                        </a:defRPr>
                       </a:pPr>
                       <a:r>
-                        <a:t/>
+                        <a:t>david.ballagh@gmail.com</a:t>
                       </a:r>
-                      <a:endParaRPr/>
                     </a:p>
                   </a:txBody>
                   <a:tcPr marT="91425" marB="91425" marR="91425" marL="91425">
@@ -13550,19 +13264,16 @@
                     <a:bodyPr/>
                     <a:lstStyle/>
                     <a:p>
-                      <a:pPr indent="0" lvl="0" marL="0" rtl="0" algn="l">
-                        <a:spcBef>
-                          <a:spcPts val="0"/>
-                        </a:spcBef>
-                        <a:spcAft>
-                          <a:spcPts val="0"/>
-                        </a:spcAft>
-                        <a:buNone/>
+                      <a:pPr>
+                        <a:defRPr sz="950">
+                          <a:solidFill>
+                            <a:srgbClr val="FFFFFF"/>
+                          </a:solidFill>
+                        </a:defRPr>
                       </a:pPr>
                       <a:r>
-                        <a:t/>
+                        <a:t>352-978-8537</a:t>
                       </a:r>
-                      <a:endParaRPr/>
                     </a:p>
                   </a:txBody>
                   <a:tcPr marT="91425" marB="91425" marR="91425" marL="91425">
@@ -13609,23 +13320,16 @@
                     <a:bodyPr/>
                     <a:lstStyle/>
                     <a:p>
-                      <a:pPr indent="0" lvl="0" marL="0" rtl="0" algn="l">
-                        <a:spcBef>
-                          <a:spcPts val="0"/>
-                        </a:spcBef>
-                        <a:spcAft>
-                          <a:spcPts val="0"/>
-                        </a:spcAft>
-                        <a:buNone/>
+                      <a:pPr>
+                        <a:defRPr sz="950">
+                          <a:solidFill>
+                            <a:srgbClr val="FFFFFF"/>
+                          </a:solidFill>
+                        </a:defRPr>
                       </a:pPr>
                       <a:r>
-                        <a:t/>
+                        <a:t>1:00</a:t>
                       </a:r>
-                      <a:endParaRPr>
-                        <a:solidFill>
-                          <a:schemeClr val="lt1"/>
-                        </a:solidFill>
-                      </a:endParaRPr>
                     </a:p>
                   </a:txBody>
                   <a:tcPr marT="19050" marB="19050" marR="28575" marL="28575">
@@ -13672,23 +13376,13 @@
                     <a:bodyPr/>
                     <a:lstStyle/>
                     <a:p>
-                      <a:pPr indent="0" lvl="0" marL="0" rtl="0" algn="l">
-                        <a:spcBef>
-                          <a:spcPts val="0"/>
-                        </a:spcBef>
-                        <a:spcAft>
-                          <a:spcPts val="0"/>
-                        </a:spcAft>
-                        <a:buNone/>
+                      <a:pPr>
+                        <a:defRPr sz="950">
+                          <a:solidFill>
+                            <a:srgbClr val="FFFFFF"/>
+                          </a:solidFill>
+                        </a:defRPr>
                       </a:pPr>
-                      <a:r>
-                        <a:t/>
-                      </a:r>
-                      <a:endParaRPr>
-                        <a:solidFill>
-                          <a:schemeClr val="lt1"/>
-                        </a:solidFill>
-                      </a:endParaRPr>
                     </a:p>
                   </a:txBody>
                   <a:tcPr marT="19050" marB="19050" marR="28575" marL="28575">
@@ -13735,19 +13429,13 @@
                     <a:bodyPr/>
                     <a:lstStyle/>
                     <a:p>
-                      <a:pPr indent="0" lvl="0" marL="0" rtl="0" algn="l">
-                        <a:spcBef>
-                          <a:spcPts val="0"/>
-                        </a:spcBef>
-                        <a:spcAft>
-                          <a:spcPts val="0"/>
-                        </a:spcAft>
-                        <a:buNone/>
+                      <a:pPr>
+                        <a:defRPr sz="950">
+                          <a:solidFill>
+                            <a:srgbClr val="FFFFFF"/>
+                          </a:solidFill>
+                        </a:defRPr>
                       </a:pPr>
-                      <a:r>
-                        <a:t/>
-                      </a:r>
-                      <a:endParaRPr/>
                     </a:p>
                   </a:txBody>
                   <a:tcPr marT="91425" marB="91425" marR="91425" marL="91425">
@@ -13796,19 +13484,16 @@
                     <a:bodyPr/>
                     <a:lstStyle/>
                     <a:p>
-                      <a:pPr indent="0" lvl="0" marL="0" rtl="0" algn="l">
-                        <a:spcBef>
-                          <a:spcPts val="0"/>
-                        </a:spcBef>
-                        <a:spcAft>
-                          <a:spcPts val="0"/>
-                        </a:spcAft>
-                        <a:buNone/>
+                      <a:pPr>
+                        <a:defRPr sz="950">
+                          <a:solidFill>
+                            <a:srgbClr val="FFFFFF"/>
+                          </a:solidFill>
+                        </a:defRPr>
                       </a:pPr>
                       <a:r>
-                        <a:t/>
+                        <a:t>Vamshi Gangula</a:t>
                       </a:r>
-                      <a:endParaRPr/>
                     </a:p>
                   </a:txBody>
                   <a:tcPr marT="91425" marB="91425" marR="91425" marL="91425">
@@ -13855,19 +13540,16 @@
                     <a:bodyPr/>
                     <a:lstStyle/>
                     <a:p>
-                      <a:pPr indent="0" lvl="0" marL="0" rtl="0" algn="l">
-                        <a:spcBef>
-                          <a:spcPts val="0"/>
-                        </a:spcBef>
-                        <a:spcAft>
-                          <a:spcPts val="0"/>
-                        </a:spcAft>
-                        <a:buNone/>
+                      <a:pPr>
+                        <a:defRPr sz="950">
+                          <a:solidFill>
+                            <a:srgbClr val="FFFFFF"/>
+                          </a:solidFill>
+                        </a:defRPr>
                       </a:pPr>
                       <a:r>
-                        <a:t/>
+                        <a:t>vkgangula@gmail.com</a:t>
                       </a:r>
-                      <a:endParaRPr/>
                     </a:p>
                   </a:txBody>
                   <a:tcPr marT="91425" marB="91425" marR="91425" marL="91425">
@@ -13914,19 +13596,16 @@
                     <a:bodyPr/>
                     <a:lstStyle/>
                     <a:p>
-                      <a:pPr indent="0" lvl="0" marL="0" rtl="0" algn="l">
-                        <a:spcBef>
-                          <a:spcPts val="0"/>
-                        </a:spcBef>
-                        <a:spcAft>
-                          <a:spcPts val="0"/>
-                        </a:spcAft>
-                        <a:buNone/>
+                      <a:pPr>
+                        <a:defRPr sz="950">
+                          <a:solidFill>
+                            <a:srgbClr val="FFFFFF"/>
+                          </a:solidFill>
+                        </a:defRPr>
                       </a:pPr>
                       <a:r>
-                        <a:t/>
+                        <a:t>503-726-8746</a:t>
                       </a:r>
-                      <a:endParaRPr/>
                     </a:p>
                   </a:txBody>
                   <a:tcPr marT="91425" marB="91425" marR="91425" marL="91425">
@@ -13973,23 +13652,16 @@
                     <a:bodyPr/>
                     <a:lstStyle/>
                     <a:p>
-                      <a:pPr indent="0" lvl="0" marL="0" rtl="0" algn="l">
-                        <a:spcBef>
-                          <a:spcPts val="0"/>
-                        </a:spcBef>
-                        <a:spcAft>
-                          <a:spcPts val="0"/>
-                        </a:spcAft>
-                        <a:buNone/>
+                      <a:pPr>
+                        <a:defRPr sz="950">
+                          <a:solidFill>
+                            <a:srgbClr val="FFFFFF"/>
+                          </a:solidFill>
+                        </a:defRPr>
                       </a:pPr>
                       <a:r>
-                        <a:t/>
+                        <a:t>1:00</a:t>
                       </a:r>
-                      <a:endParaRPr>
-                        <a:solidFill>
-                          <a:schemeClr val="lt1"/>
-                        </a:solidFill>
-                      </a:endParaRPr>
                     </a:p>
                   </a:txBody>
                   <a:tcPr marT="19050" marB="19050" marR="28575" marL="28575">
@@ -14036,23 +13708,13 @@
                     <a:bodyPr/>
                     <a:lstStyle/>
                     <a:p>
-                      <a:pPr indent="0" lvl="0" marL="0" rtl="0" algn="l">
-                        <a:spcBef>
-                          <a:spcPts val="0"/>
-                        </a:spcBef>
-                        <a:spcAft>
-                          <a:spcPts val="0"/>
-                        </a:spcAft>
-                        <a:buNone/>
+                      <a:pPr>
+                        <a:defRPr sz="950">
+                          <a:solidFill>
+                            <a:srgbClr val="FFFFFF"/>
+                          </a:solidFill>
+                        </a:defRPr>
                       </a:pPr>
-                      <a:r>
-                        <a:t/>
-                      </a:r>
-                      <a:endParaRPr>
-                        <a:solidFill>
-                          <a:schemeClr val="lt1"/>
-                        </a:solidFill>
-                      </a:endParaRPr>
                     </a:p>
                   </a:txBody>
                   <a:tcPr marT="19050" marB="19050" marR="28575" marL="28575">
@@ -14099,19 +13761,13 @@
                     <a:bodyPr/>
                     <a:lstStyle/>
                     <a:p>
-                      <a:pPr indent="0" lvl="0" marL="0" rtl="0" algn="l">
-                        <a:spcBef>
-                          <a:spcPts val="0"/>
-                        </a:spcBef>
-                        <a:spcAft>
-                          <a:spcPts val="0"/>
-                        </a:spcAft>
-                        <a:buNone/>
+                      <a:pPr>
+                        <a:defRPr sz="950">
+                          <a:solidFill>
+                            <a:srgbClr val="FFFFFF"/>
+                          </a:solidFill>
+                        </a:defRPr>
                       </a:pPr>
-                      <a:r>
-                        <a:t/>
-                      </a:r>
-                      <a:endParaRPr/>
                     </a:p>
                   </a:txBody>
                   <a:tcPr marT="91425" marB="91425" marR="91425" marL="91425">
@@ -15653,8 +15309,8 @@
         </p:nvSpPr>
         <p:spPr>
           <a:xfrm>
-            <a:off x="1097280" y="1371600"/>
-            <a:ext cx="6949440" cy="3291840"/>
+            <a:off x="2769600" y="2637075"/>
+            <a:ext cx="3604800" cy="2071800"/>
           </a:xfrm>
           <a:prstGeom prst="rect">
             <a:avLst/>
@@ -15678,18 +15334,17 @@
                 <a:spcPts val="1200"/>
               </a:spcBef>
               <a:spcAft>
-                <a:spcPts val="300"/>
-              </a:spcAft>
-              <a:buNone/>
-              <a:defRPr b="1" sz="1300">
+                <a:spcPts val="400"/>
+              </a:spcAft>
+              <a:buNone/>
+              <a:defRPr sz="1400" b="1">
                 <a:solidFill>
-                  <a:srgbClr val="D93025"/>
+                  <a:srgbClr val="FFFFFF"/>
                 </a:solidFill>
-                <a:latin typeface="Google Sans Flex Medium"/>
               </a:defRPr>
             </a:pPr>
             <a:r>
-              <a:t>⚠️ Real-World Challenge: Atlanta's Urban Heat Disparity</a:t>
+              <a:t>Real-world challenge</a:t>
             </a:r>
             <a:endParaRPr sz="1200">
               <a:solidFill>
@@ -15698,119 +15353,45 @@
             </a:endParaRPr>
           </a:p>
           <a:p>
-            <a:pPr>
-              <a:spcAft>
-                <a:spcPts val="300"/>
-              </a:spcAft>
+            <a:pPr algn="ctr">
+              <a:spcAft>
+                <a:spcPts val="2400"/>
+              </a:spcAft>
+              <a:defRPr sz="1300">
+                <a:solidFill>
+                  <a:srgbClr val="FFFFFF"/>
+                </a:solidFill>
+              </a:defRPr>
             </a:pPr>
             <a:r>
-              <a:rPr b="1" sz="950">
-                <a:solidFill>
-                  <a:srgbClr val="202124"/>
-                </a:solidFill>
-                <a:latin typeface="Google Sans Flex"/>
-              </a:rPr>
-              <a:t>• The Airport Forecast Fallacy: </a:t>
-            </a:r>
-            <a:r>
-              <a:rPr sz="950">
-                <a:solidFill>
-                  <a:srgbClr val="202124"/>
-                </a:solidFill>
-                <a:latin typeface="Google Sans Flex"/>
-              </a:rPr>
-              <a:t>Regional forecasts quote KATL Airport (95°F), hiding lethal street-level microclimates running up to +4.77°F hotter in dense asphalt corridors like Sweet Auburn.</a:t>
+              <a:t>Severe urban heat islands threatening public health across vulnerable, tree-deprived Atlanta neighborhoods.</a:t>
             </a:r>
           </a:p>
           <a:p>
-            <a:pPr>
-              <a:spcAft>
-                <a:spcPts val="300"/>
-              </a:spcAft>
+            <a:pPr algn="ctr">
+              <a:spcAft>
+                <a:spcPts val="400"/>
+              </a:spcAft>
+              <a:defRPr sz="1400" b="1">
+                <a:solidFill>
+                  <a:srgbClr val="FFFFFF"/>
+                </a:solidFill>
+              </a:defRPr>
             </a:pPr>
             <a:r>
-              <a:rPr b="1" sz="950">
-                <a:solidFill>
-                  <a:srgbClr val="202124"/>
-                </a:solidFill>
-                <a:latin typeface="Google Sans Flex"/>
-              </a:rPr>
-              <a:t>• Severe Transit &amp; Canopy Deprivation: </a:t>
-            </a:r>
-            <a:r>
-              <a:rPr sz="950">
-                <a:solidFill>
-                  <a:srgbClr val="202124"/>
-                </a:solidFill>
-                <a:latin typeface="Google Sans Flex"/>
-              </a:rPr>
-              <a:t>In the hottest census tracts, &gt;47% of households have no vehicle and tree canopy drops below 33%. Residents cannot walk or drive miles across town to regional cooling centers.</a:t>
+              <a:t>Details</a:t>
             </a:r>
           </a:p>
           <a:p>
-            <a:pPr>
-              <a:spcAft>
-                <a:spcPts val="300"/>
-              </a:spcAft>
-              <a:defRPr b="1" sz="1300">
+            <a:pPr algn="ctr">
+              <a:defRPr sz="1300">
                 <a:solidFill>
-                  <a:srgbClr val="1A73E8"/>
+                  <a:srgbClr val="FFFFFF"/>
                 </a:solidFill>
-                <a:latin typeface="Google Sans Flex Medium"/>
               </a:defRPr>
             </a:pPr>
             <a:r>
-              <a:t>🏛️ Details: The Municipal Decision Crisis</a:t>
-            </a:r>
-          </a:p>
-          <a:p>
-            <a:pPr>
-              <a:spcAft>
-                <a:spcPts val="300"/>
-              </a:spcAft>
-            </a:pPr>
-            <a:r>
-              <a:rPr b="1" sz="950">
-                <a:solidFill>
-                  <a:srgbClr val="202124"/>
-                </a:solidFill>
-                <a:latin typeface="Google Sans Flex"/>
-              </a:rPr>
-              <a:t>• The Persona (Dana, City Manager's Office): </a:t>
-            </a:r>
-            <a:r>
-              <a:rPr sz="950">
-                <a:solidFill>
-                  <a:srgbClr val="202124"/>
-                </a:solidFill>
-                <a:latin typeface="Google Sans Flex"/>
-              </a:rPr>
-              <a:t>Must site 3 permanent cooling centers / resilience hubs ahead of a 102°F heatwave for City Council authorization tomorrow at 9:00 AM.</a:t>
-            </a:r>
-          </a:p>
-          <a:p>
-            <a:pPr>
-              <a:spcAft>
-                <a:spcPts val="300"/>
-              </a:spcAft>
-            </a:pPr>
-            <a:r>
-              <a:rPr b="1" sz="950">
-                <a:solidFill>
-                  <a:srgbClr val="202124"/>
-                </a:solidFill>
-                <a:latin typeface="Google Sans Flex"/>
-              </a:rPr>
-              <a:t>• Why It Matters on a Societal Scale: </a:t>
-            </a:r>
-            <a:r>
-              <a:rPr sz="950">
-                <a:solidFill>
-                  <a:srgbClr val="202124"/>
-                </a:solidFill>
-                <a:latin typeface="Google Sans Flex"/>
-              </a:rPr>
-              <a:t>Heat is America's deadliest climate hazard. Grounding siting in empirical microclimates and pedestrian walk networks prevents heat mortality and eliminates political bias.</a:t>
+              <a:t>Vulnerable residents benefit; mitigates heat deaths, lowers energy costs, and advances climate equity.</a:t>
             </a:r>
           </a:p>
         </p:txBody>
@@ -15895,8 +15476,8 @@
         </p:nvSpPr>
         <p:spPr>
           <a:xfrm>
-            <a:off x="1097280" y="1280160"/>
-            <a:ext cx="6949440" cy="3474720"/>
+            <a:off x="2585575" y="2405175"/>
+            <a:ext cx="3862800" cy="1727100"/>
           </a:xfrm>
           <a:prstGeom prst="rect">
             <a:avLst/>
@@ -15920,185 +15501,60 @@
                 <a:spcPts val="1200"/>
               </a:spcBef>
               <a:spcAft>
-                <a:spcPts val="300"/>
-              </a:spcAft>
-              <a:buNone/>
-              <a:defRPr b="1" sz="1300">
+                <a:spcPts val="400"/>
+              </a:spcAft>
+              <a:buNone/>
+              <a:defRPr sz="1400" b="1">
                 <a:solidFill>
-                  <a:srgbClr val="1A73E8"/>
+                  <a:srgbClr val="FFFFFF"/>
                 </a:solidFill>
-                <a:latin typeface="Google Sans Flex Medium"/>
               </a:defRPr>
             </a:pPr>
             <a:r>
-              <a:t>🤖 Our Custom Agent: Creating Meaningful Change</a:t>
+              <a:t>Our Agent</a:t>
             </a:r>
             <a:endParaRPr sz="1200"/>
           </a:p>
           <a:p>
-            <a:pPr>
-              <a:spcAft>
-                <a:spcPts val="300"/>
-              </a:spcAft>
+            <a:pPr algn="ctr">
+              <a:spcAft>
+                <a:spcPts val="2400"/>
+              </a:spcAft>
+              <a:defRPr sz="1300">
+                <a:solidFill>
+                  <a:srgbClr val="FFFFFF"/>
+                </a:solidFill>
+              </a:defRPr>
             </a:pPr>
             <a:r>
-              <a:rPr b="1" sz="950">
-                <a:solidFill>
-                  <a:srgbClr val="202124"/>
-                </a:solidFill>
-                <a:latin typeface="Google Sans Flex"/>
-              </a:rPr>
-              <a:t>• Autonomous Municipal Advisor: </a:t>
-            </a:r>
-            <a:r>
-              <a:rPr sz="950">
-                <a:solidFill>
-                  <a:srgbClr val="202124"/>
-                </a:solidFill>
-                <a:latin typeface="Google Sans Flex"/>
-              </a:rPr>
-              <a:t>Powered by Gemini 2.5 Flash on Vertex AI via Google ADK with 7 specialized Python domain tools connecting directly to BigQuery ML.</a:t>
+              <a:t>Predicts hyper-local heat spikes to deploy targeted cooling interventions and life-saving community alerts.</a:t>
             </a:r>
           </a:p>
           <a:p>
-            <a:pPr>
-              <a:spcAft>
-                <a:spcPts val="300"/>
-              </a:spcAft>
+            <a:pPr algn="ctr">
+              <a:spcAft>
+                <a:spcPts val="400"/>
+              </a:spcAft>
+              <a:defRPr sz="1400" b="1">
+                <a:solidFill>
+                  <a:srgbClr val="FFFFFF"/>
+                </a:solidFill>
+              </a:defRPr>
             </a:pPr>
             <a:r>
-              <a:rPr b="1" sz="950">
-                <a:solidFill>
-                  <a:srgbClr val="202124"/>
-                </a:solidFill>
-                <a:latin typeface="Google Sans Flex"/>
-              </a:rPr>
-              <a:t>• Conversational Landmark Search: </a:t>
-            </a:r>
-            <a:r>
-              <a:rPr sz="950">
-                <a:solidFill>
-                  <a:srgbClr val="202124"/>
-                </a:solidFill>
-                <a:latin typeface="Google Sans Flex"/>
-              </a:rPr>
-              <a:t>Planners query natural street names ('Sweet Auburn', 'Peoplestown'). The agent resolves Census GEOIDs automatically, eliminating technical friction.</a:t>
+              <a:t>Details</a:t>
             </a:r>
           </a:p>
           <a:p>
-            <a:pPr>
-              <a:spcAft>
-                <a:spcPts val="300"/>
-              </a:spcAft>
-            </a:pPr>
-            <a:r>
-              <a:rPr b="1" sz="950">
+            <a:pPr algn="ctr">
+              <a:defRPr sz="1300">
                 <a:solidFill>
-                  <a:srgbClr val="202124"/>
+                  <a:srgbClr val="FFFFFF"/>
                 </a:solidFill>
-                <a:latin typeface="Google Sans Flex"/>
-              </a:rPr>
-              <a:t>• 10-Minute Pedestrian Isochrones: </a:t>
-            </a:r>
-            <a:r>
-              <a:rPr sz="950">
-                <a:solidFill>
-                  <a:srgbClr val="202124"/>
-                </a:solidFill>
-                <a:latin typeface="Google Sans Flex"/>
-              </a:rPr>
-              <a:t>Replaces circular Euclidean radii with 800m street-network walk buffers, accounting for physical highway, rail, and transit access barriers.</a:t>
-            </a:r>
-          </a:p>
-          <a:p>
-            <a:pPr>
-              <a:spcAft>
-                <a:spcPts val="300"/>
-              </a:spcAft>
-              <a:defRPr b="1" sz="1300">
-                <a:solidFill>
-                  <a:srgbClr val="1E8E3E"/>
-                </a:solidFill>
-                <a:latin typeface="Google Sans Flex Medium"/>
               </a:defRPr>
             </a:pPr>
             <a:r>
-              <a:t>📈 Details: Concrete, Defensible Outcomes</a:t>
-            </a:r>
-          </a:p>
-          <a:p>
-            <a:pPr>
-              <a:spcAft>
-                <a:spcPts val="300"/>
-              </a:spcAft>
-            </a:pPr>
-            <a:r>
-              <a:rPr b="1" sz="950">
-                <a:solidFill>
-                  <a:srgbClr val="202124"/>
-                </a:solidFill>
-                <a:latin typeface="Google Sans Flex"/>
-              </a:rPr>
-              <a:t>• Top 3 Recommended Sites: </a:t>
-            </a:r>
-            <a:r>
-              <a:rPr sz="950">
-                <a:solidFill>
-                  <a:srgbClr val="202124"/>
-                </a:solidFill>
-                <a:latin typeface="Google Sans Flex"/>
-              </a:rPr>
-              <a:t>Sweet Auburn (Tract 27, Score 0.864, +4.61°F offset), South Pryor (Tract 55.02, Score 0.838, +3.94°F), and Mechanicsville (Tract 56, Score 0.811, +3.78°F), sheltering 19,850 high-risk residents.</a:t>
-            </a:r>
-          </a:p>
-          <a:p>
-            <a:pPr>
-              <a:spcAft>
-                <a:spcPts val="300"/>
-              </a:spcAft>
-            </a:pPr>
-            <a:r>
-              <a:rPr b="1" sz="950">
-                <a:solidFill>
-                  <a:srgbClr val="202124"/>
-                </a:solidFill>
-                <a:latin typeface="Google Sans Flex"/>
-              </a:rPr>
-              <a:t>• 100% Outcome Equity Audit: </a:t>
-            </a:r>
-            <a:r>
-              <a:rPr sz="950">
-                <a:solidFill>
-                  <a:srgbClr val="202124"/>
-                </a:solidFill>
-                <a:latin typeface="Google Sans Flex"/>
-              </a:rPr>
-              <a:t>All selected sites clear Atlanta's 75th-percentile hardship thresholds (poverty ≥24.5%, carlessness ≥14.8%), guaranteeing zero equity drift.</a:t>
-            </a:r>
-          </a:p>
-          <a:p>
-            <a:pPr>
-              <a:spcAft>
-                <a:spcPts val="300"/>
-              </a:spcAft>
-            </a:pPr>
-            <a:r>
-              <a:rPr b="1" sz="950">
-                <a:solidFill>
-                  <a:srgbClr val="202124"/>
-                </a:solidFill>
-                <a:latin typeface="Google Sans Flex"/>
-              </a:rPr>
-              <a:t>• 1-Click Council Resolution Memo: </a:t>
-            </a:r>
-            <a:r>
-              <a:rPr sz="950">
-                <a:solidFill>
-                  <a:srgbClr val="202124"/>
-                </a:solidFill>
-                <a:latin typeface="Google Sans Flex"/>
-              </a:rPr>
-              <a:t>Generates pre-populated legislative resolution with statutory citations, model justifications, and funding allocations ready for immediate Council vote.</a:t>
+              <a:t>Planners query interactive heat maps to prioritize shade infrastructure, optimizing municipal budgets and resilience.</a:t>
             </a:r>
           </a:p>
         </p:txBody>
@@ -16199,8 +15655,8 @@
         </p:nvSpPr>
         <p:spPr>
           <a:xfrm>
-            <a:off x="731520" y="1234440"/>
-            <a:ext cx="7680960" cy="3566160"/>
+            <a:off x="489150" y="1714450"/>
+            <a:ext cx="5587500" cy="1909500"/>
           </a:xfrm>
           <a:prstGeom prst="rect">
             <a:avLst/>
@@ -16224,18 +15680,17 @@
                 <a:spcPts val="1200"/>
               </a:spcBef>
               <a:spcAft>
-                <a:spcPts val="300"/>
-              </a:spcAft>
-              <a:buNone/>
-              <a:defRPr b="1" sz="1300">
+                <a:spcPts val="800"/>
+              </a:spcAft>
+              <a:buNone/>
+              <a:defRPr sz="950">
                 <a:solidFill>
-                  <a:srgbClr val="1A73E8"/>
+                  <a:srgbClr val="FFFFFF"/>
                 </a:solidFill>
-                <a:latin typeface="Google Sans Flex Medium"/>
               </a:defRPr>
             </a:pPr>
             <a:r>
-              <a:t>🗄️ Curated Data Ecosystem Powering the Agent</a:t>
+              <a:t>Our data ecosystem is orchestrated on Google Cloud, fusing petabyte-scale geospatial telemetry, municipal infrastructure layers, and public health indicators inside BigQuery.</a:t>
             </a:r>
             <a:endParaRPr sz="1200">
               <a:solidFill>
@@ -16250,167 +15705,103 @@
           <a:p>
             <a:pPr>
               <a:spcAft>
-                <a:spcPts val="300"/>
-              </a:spcAft>
+                <a:spcPts val="800"/>
+              </a:spcAft>
+              <a:defRPr sz="950">
+                <a:solidFill>
+                  <a:srgbClr val="FFFFFF"/>
+                </a:solidFill>
+              </a:defRPr>
             </a:pPr>
             <a:r>
-              <a:rPr b="1" sz="950">
-                <a:solidFill>
-                  <a:srgbClr val="202124"/>
-                </a:solidFill>
-                <a:latin typeface="Google Sans Flex"/>
-              </a:rPr>
-              <a:t>• NOAA Heat Watch Vehicle Traverses: </a:t>
-            </a:r>
-            <a:r>
-              <a:rPr sz="950">
-                <a:solidFill>
-                  <a:srgbClr val="202124"/>
-                </a:solidFill>
-                <a:latin typeface="Google Sans Flex"/>
-              </a:rPr>
-              <a:t>High-resolution temperature traverses across 131 Fulton County census tracts on an extreme summer day, capturing afternoon peak heating.</a:t>
+              <a:t>By coupling Google Earth Engine’s automated satellite pipeline with BigQuery Spatial SQL, the agent performs real-time multi-criteria analysis across environmental, structural, and demographic variables.</a:t>
             </a:r>
           </a:p>
           <a:p>
             <a:pPr>
               <a:spcAft>
-                <a:spcPts val="300"/>
-              </a:spcAft>
+                <a:spcPts val="1200"/>
+              </a:spcAft>
+              <a:defRPr sz="950">
+                <a:solidFill>
+                  <a:srgbClr val="FFFFFF"/>
+                </a:solidFill>
+              </a:defRPr>
             </a:pPr>
             <a:r>
-              <a:rPr b="1" sz="950">
-                <a:solidFill>
-                  <a:srgbClr val="202124"/>
-                </a:solidFill>
-                <a:latin typeface="Google Sans Flex"/>
-              </a:rPr>
-              <a:t>• BigQuery ML (heat_offset_model): </a:t>
-            </a:r>
-            <a:r>
-              <a:rPr sz="950">
-                <a:solidFill>
-                  <a:srgbClr val="202124"/>
-                </a:solidFill>
-                <a:latin typeface="Google Sans Flex"/>
-              </a:rPr>
-              <a:t>LINEAR_REG model predicting microclimate thermal offset (ΔT ∈ [-1.2°F, +4.77°F]) relative to city baseline—isolating physical infrastructure from weather noise.</a:t>
+              <a:t>This continuous data backbone breaks down municipal silos, transforming raw static archives into a live predictive intelligence engine tailored for municipal decision-makers.</a:t>
             </a:r>
           </a:p>
           <a:p>
             <a:pPr>
               <a:spcAft>
-                <a:spcPts val="300"/>
-              </a:spcAft>
+                <a:spcPts val="400"/>
+              </a:spcAft>
+              <a:defRPr sz="1100" b="1">
+                <a:solidFill>
+                  <a:srgbClr val="FFFFFF"/>
+                </a:solidFill>
+              </a:defRPr>
             </a:pPr>
             <a:r>
-              <a:rPr b="1" sz="950">
-                <a:solidFill>
-                  <a:srgbClr val="202124"/>
-                </a:solidFill>
-                <a:latin typeface="Google Sans Flex"/>
-              </a:rPr>
-              <a:t>• CDC Social Vulnerability Index (SVI 2022) &amp; Census ACS: </a:t>
-            </a:r>
-            <a:r>
-              <a:rPr sz="950">
-                <a:solidFill>
-                  <a:srgbClr val="202124"/>
-                </a:solidFill>
-                <a:latin typeface="Google Sans Flex"/>
-              </a:rPr>
-              <a:t>Tract-level poverty rates (≥24.5% hardship threshold), vehicle availability (≥14.8% carless), pre-1970 housing age, and elderly populations.</a:t>
+              <a:t>Details</a:t>
             </a:r>
           </a:p>
           <a:p>
             <a:pPr>
               <a:spcAft>
-                <a:spcPts val="300"/>
-              </a:spcAft>
+                <a:spcPts val="800"/>
+              </a:spcAft>
+              <a:defRPr sz="950">
+                <a:solidFill>
+                  <a:srgbClr val="FFFFFF"/>
+                </a:solidFill>
+              </a:defRPr>
             </a:pPr>
             <a:r>
-              <a:rPr b="1" sz="950">
-                <a:solidFill>
-                  <a:srgbClr val="202124"/>
-                </a:solidFill>
-                <a:latin typeface="Google Sans Flex"/>
-              </a:rPr>
-              <a:t>• NOAA GHCN Station Max (2018–2025): </a:t>
-            </a:r>
-            <a:r>
-              <a:rPr sz="950">
-                <a:solidFill>
-                  <a:srgbClr val="202124"/>
-                </a:solidFill>
-                <a:latin typeface="Google Sans Flex"/>
-              </a:rPr>
-              <a:t>7-year historical weather station records providing longitudinal context and spatial interpolation calibration.</a:t>
+              <a:t>We ingest high-resolution Landsat-9 and Sentinel-2 thermal imagery alongside live NOAA weather stations to map surface temperature anomalies down to the parcel level.</a:t>
             </a:r>
           </a:p>
           <a:p>
             <a:pPr>
               <a:spcAft>
-                <a:spcPts val="300"/>
-              </a:spcAft>
-              <a:defRPr b="1" sz="1300">
+                <a:spcPts val="800"/>
+              </a:spcAft>
+              <a:defRPr sz="950">
                 <a:solidFill>
-                  <a:srgbClr val="D93025"/>
+                  <a:srgbClr val="FFFFFF"/>
                 </a:solidFill>
-                <a:latin typeface="Google Sans Flex Medium"/>
               </a:defRPr>
             </a:pPr>
             <a:r>
-              <a:t>🔍 Details: Explainability &amp; Bias Handling</a:t>
+              <a:t>These thermal models are joined with City of Atlanta Open GIS layers—specifically LiDAR tree canopy assessments, impervious surface footprints, and municipal zoning boundaries—to diagnose built-environment heat traps.</a:t>
             </a:r>
           </a:p>
           <a:p>
             <a:pPr>
               <a:spcAft>
-                <a:spcPts val="300"/>
-              </a:spcAft>
+                <a:spcPts val="1200"/>
+              </a:spcAft>
+              <a:defRPr sz="950">
+                <a:solidFill>
+                  <a:srgbClr val="FFFFFF"/>
+                </a:solidFill>
+              </a:defRPr>
             </a:pPr>
             <a:r>
-              <a:rPr b="1" sz="950">
-                <a:solidFill>
-                  <a:srgbClr val="202124"/>
-                </a:solidFill>
-                <a:latin typeface="Google Sans Flex"/>
-              </a:rPr>
-              <a:t>• ML.EXPLAIN_PREDICT Decomposition: </a:t>
-            </a:r>
-            <a:r>
-              <a:rPr sz="950">
-                <a:solidFill>
-                  <a:srgbClr val="202124"/>
-                </a:solidFill>
-                <a:latin typeface="Google Sans Flex"/>
-              </a:rPr>
-              <a:t>Decomposes heat drivers per block: canopy deficit (+2.4°F), impervious surface density (+1.8°F), and pre-1970 housing vintage.</a:t>
+              <a:t>Crucially, the agent cross-references CDC Social Vulnerability Index (SVI) BigQuery tables, U.S. Census ACS economic data, and NREL energy burden metrics to ensure cooling investments are prioritized in historically underserved neighborhoods.</a:t>
             </a:r>
           </a:p>
           <a:p>
             <a:pPr>
-              <a:spcAft>
-                <a:spcPts val="300"/>
-              </a:spcAft>
+              <a:defRPr sz="950" i="1">
+                <a:solidFill>
+                  <a:srgbClr val="B4B4B4"/>
+                </a:solidFill>
+              </a:defRPr>
             </a:pPr>
             <a:r>
-              <a:rPr b="1" sz="950">
-                <a:solidFill>
-                  <a:srgbClr val="202124"/>
-                </a:solidFill>
-                <a:latin typeface="Google Sans Flex"/>
-              </a:rPr>
-              <a:t>• Proactive Bias Handling by Design: </a:t>
-            </a:r>
-            <a:r>
-              <a:rPr sz="950">
-                <a:solidFill>
-                  <a:srgbClr val="202124"/>
-                </a:solidFill>
-                <a:latin typeface="Google Sans Flex"/>
-              </a:rPr>
-              <a:t>Race and ethnicity variables were strictly EXCLUDED from model training to prevent self-fulfilling redlining proxies; equity is enforced post-hoc on outcomes.</a:t>
+              <a:t>*Architecture included in GitHub</a:t>
             </a:r>
           </a:p>
         </p:txBody>
@@ -16523,8 +15914,8 @@
         </p:nvSpPr>
         <p:spPr>
           <a:xfrm>
-            <a:off x="731520" y="1234440"/>
-            <a:ext cx="7680960" cy="3566160"/>
+            <a:off x="609400" y="2019250"/>
+            <a:ext cx="4605300" cy="2242800"/>
           </a:xfrm>
           <a:prstGeom prst="rect">
             <a:avLst/>
@@ -16548,18 +15939,17 @@
                 <a:spcPts val="1200"/>
               </a:spcBef>
               <a:spcAft>
-                <a:spcPts val="300"/>
-              </a:spcAft>
-              <a:buNone/>
-              <a:defRPr b="1" sz="1300">
+                <a:spcPts val="1000"/>
+              </a:spcAft>
+              <a:buNone/>
+              <a:defRPr sz="1150" b="1">
                 <a:solidFill>
-                  <a:srgbClr val="1A73E8"/>
+                  <a:srgbClr val="FFFFFF"/>
                 </a:solidFill>
-                <a:latin typeface="Google Sans Flex Medium"/>
               </a:defRPr>
             </a:pPr>
             <a:r>
-              <a:t>🏗️ Technical Build &amp; Multi-Agent Architecture Blueprint</a:t>
+              <a:t>Details: Multi-Agent Mechanics &amp; Communication</a:t>
             </a:r>
             <a:endParaRPr sz="1200">
               <a:solidFill>
@@ -16576,49 +15966,29 @@
               <a:spcAft>
                 <a:spcPts val="300"/>
               </a:spcAft>
+              <a:defRPr sz="1000" b="1">
+                <a:solidFill>
+                  <a:srgbClr val="FFFFFF"/>
+                </a:solidFill>
+              </a:defRPr>
             </a:pPr>
             <a:r>
-              <a:rPr b="1" sz="950">
-                <a:solidFill>
-                  <a:srgbClr val="202124"/>
-                </a:solidFill>
-                <a:latin typeface="Google Sans Flex"/>
-              </a:rPr>
-              <a:t>• Presentation Plane (React 18 + TS + Leaflet): </a:t>
-            </a:r>
-            <a:r>
-              <a:rPr sz="950">
-                <a:solidFill>
-                  <a:srgbClr val="202124"/>
-                </a:solidFill>
-                <a:latin typeface="Google Sans Flex"/>
-              </a:rPr>
-              <a:t>Municipal executive dashboard with real-time temperature slider (85°–105°F), interactive 800m isochrone walk overlays, and zero-key OSM map tiles.</a:t>
+              <a:t>1. Supervisor Orchestration (ADK Framework):</a:t>
             </a:r>
           </a:p>
           <a:p>
             <a:pPr>
               <a:spcAft>
-                <a:spcPts val="300"/>
-              </a:spcAft>
+                <a:spcPts val="800"/>
+              </a:spcAft>
+              <a:defRPr sz="900">
+                <a:solidFill>
+                  <a:srgbClr val="FFFFFF"/>
+                </a:solidFill>
+              </a:defRPr>
             </a:pPr>
             <a:r>
-              <a:rPr b="1" sz="950">
-                <a:solidFill>
-                  <a:srgbClr val="202124"/>
-                </a:solidFill>
-                <a:latin typeface="Google Sans Flex"/>
-              </a:rPr>
-              <a:t>• Agent Runtime (Gemini 2.5 Flash on Vertex AI): </a:t>
-            </a:r>
-            <a:r>
-              <a:rPr sz="950">
-                <a:solidFill>
-                  <a:srgbClr val="202124"/>
-                </a:solidFill>
-                <a:latin typeface="Google Sans Flex"/>
-              </a:rPr>
-              <a:t>Google ADK orchestration runtime with isolated planning sessions, bounded spatial guardrails ([-84.55, 33.64] to [-84.28, 33.89]), and correlated telemetry spans.</a:t>
+              <a:t>The Lead Orchestrator Agent acts as the central state manager built using the Agent Development Kit (ADK). When a planner inputs a goal (e.g., "Allocate $2M to reduce heat vulnerability in District 4"), the Orchestrator decomposes the request into parallel, task-specific sub-queries and manages context across sub-agents.</a:t>
             </a:r>
           </a:p>
           <a:p>
@@ -16626,49 +15996,41 @@
               <a:spcAft>
                 <a:spcPts val="300"/>
               </a:spcAft>
+              <a:defRPr sz="1000" b="1">
+                <a:solidFill>
+                  <a:srgbClr val="FFFFFF"/>
+                </a:solidFill>
+              </a:defRPr>
             </a:pPr>
             <a:r>
-              <a:rPr b="1" sz="950">
-                <a:solidFill>
-                  <a:srgbClr val="202124"/>
-                </a:solidFill>
-                <a:latin typeface="Google Sans Flex"/>
-              </a:rPr>
-              <a:t>• Domain Toolset (7 Python Bindings): </a:t>
-            </a:r>
-            <a:r>
-              <a:rPr sz="950">
-                <a:solidFill>
-                  <a:srgbClr val="202124"/>
-                </a:solidFill>
-                <a:latin typeface="Google Sans Flex"/>
-              </a:rPr>
-              <a:t>predict_heat_offset, rank_cooling_centers, audit_equity, compare_tracts, query_history, generate_council_memo with standardized error contracts.</a:t>
+              <a:t>2. Standardized Tool Integration (Model Context Protocol / MCP):</a:t>
             </a:r>
           </a:p>
           <a:p>
             <a:pPr>
               <a:spcAft>
-                <a:spcPts val="300"/>
-              </a:spcAft>
+                <a:spcPts val="800"/>
+              </a:spcAft>
+              <a:defRPr sz="900">
+                <a:solidFill>
+                  <a:srgbClr val="FFFFFF"/>
+                </a:solidFill>
+              </a:defRPr>
             </a:pPr>
             <a:r>
-              <a:rPr b="1" sz="950">
-                <a:solidFill>
-                  <a:srgbClr val="202124"/>
-                </a:solidFill>
-                <a:latin typeface="Google Sans Flex"/>
-              </a:rPr>
-              <a:t>• Serverless Infrastructure (Cloud Run Gen2): </a:t>
+              <a:t>Each sub-agent connects to underlying data lakes using standardized MCP servers via JSON-RPC:</a:t>
             </a:r>
+            <a:br/>
             <a:r>
-              <a:rPr sz="950">
-                <a:solidFill>
-                  <a:srgbClr val="202124"/>
-                </a:solidFill>
-                <a:latin typeface="Google Sans Flex"/>
-              </a:rPr>
-              <a:t>Production Python service hosting /run endpoint (&lt;600ms latency), Application Default Credentials (zero API key exposure), and reverse-proxied /api/agent via Vite.</a:t>
+              <a:t>  ○ Thermal Agent: Calls the Earth Engine MCP tool to retrieve real-time Landsat-9 Land Surface Temperatures (LST) and NOAA meteorological data.</a:t>
+            </a:r>
+            <a:br/>
+            <a:r>
+              <a:t>  ○ Urban Spatial Agent: Calls the BigQuery Spatial MCP tool to evaluate Atlanta parcel footprints, LiDAR tree canopy, and impervious asphalt ratios.</a:t>
+            </a:r>
+            <a:br/>
+            <a:r>
+              <a:t>  ○ Social Vulnerability Agent: Interfaces with BigQuery to extract CDC SVI metrics and Census demographic profiles.</a:t>
             </a:r>
           </a:p>
           <a:p>
@@ -16676,90 +16038,29 @@
               <a:spcAft>
                 <a:spcPts val="300"/>
               </a:spcAft>
-              <a:defRPr b="1" sz="1300">
+              <a:defRPr sz="1000" b="1">
                 <a:solidFill>
-                  <a:srgbClr val="1E8E3E"/>
+                  <a:srgbClr val="FFFFFF"/>
                 </a:solidFill>
-                <a:latin typeface="Google Sans Flex Medium"/>
               </a:defRPr>
             </a:pPr>
             <a:r>
-              <a:t>🗺️ Multi-Clock Strategic Roadmap</a:t>
+              <a:t>3. Synthesis &amp; Feedback Loop:</a:t>
             </a:r>
           </a:p>
           <a:p>
             <a:pPr>
               <a:spcAft>
-                <a:spcPts val="300"/>
-              </a:spcAft>
+                <a:spcPts val="800"/>
+              </a:spcAft>
+              <a:defRPr sz="900">
+                <a:solidFill>
+                  <a:srgbClr val="FFFFFF"/>
+                </a:solidFill>
+              </a:defRPr>
             </a:pPr>
             <a:r>
-              <a:rPr b="1" sz="950">
-                <a:solidFill>
-                  <a:srgbClr val="202124"/>
-                </a:solidFill>
-                <a:latin typeface="Google Sans Flex"/>
-              </a:rPr>
-              <a:t>• ⚡ Today (Emergency): </a:t>
-            </a:r>
-            <a:r>
-              <a:rPr sz="950">
-                <a:solidFill>
-                  <a:srgbClr val="202124"/>
-                </a:solidFill>
-                <a:latin typeface="Google Sans Flex"/>
-              </a:rPr>
-              <a:t>Dispatch mobile hydration vans and cooling buses to Sweet Auburn during Heat Advisories (≥95°F).</a:t>
-            </a:r>
-          </a:p>
-          <a:p>
-            <a:pPr>
-              <a:spcAft>
-                <a:spcPts val="300"/>
-              </a:spcAft>
-            </a:pPr>
-            <a:r>
-              <a:rPr b="1" sz="950">
-                <a:solidFill>
-                  <a:srgbClr val="202124"/>
-                </a:solidFill>
-                <a:latin typeface="Google Sans Flex"/>
-              </a:rPr>
-              <a:t>• 🏛️ This Budget Cycle: </a:t>
-            </a:r>
-            <a:r>
-              <a:rPr sz="950">
-                <a:solidFill>
-                  <a:srgbClr val="202124"/>
-                </a:solidFill>
-                <a:latin typeface="Google Sans Flex"/>
-              </a:rPr>
-              <a:t>Fund solar-reflective shade-sails at 42 unshaded MARTA stops inside 10-minute walk buffers.</a:t>
-            </a:r>
-          </a:p>
-          <a:p>
-            <a:pPr>
-              <a:spcAft>
-                <a:spcPts val="300"/>
-              </a:spcAft>
-            </a:pPr>
-            <a:r>
-              <a:rPr b="1" sz="950">
-                <a:solidFill>
-                  <a:srgbClr val="202124"/>
-                </a:solidFill>
-                <a:latin typeface="Google Sans Flex"/>
-              </a:rPr>
-              <a:t>• 🌳 This Decade: </a:t>
-            </a:r>
-            <a:r>
-              <a:rPr sz="950">
-                <a:solidFill>
-                  <a:srgbClr val="202124"/>
-                </a:solidFill>
-                <a:latin typeface="Google Sans Flex"/>
-              </a:rPr>
-              <a:t>Urban forestry program targeted at the bottom 20% canopy tracts to reverse microclimate disparity.</a:t>
+              <a:t>Once data agents return their vector analyses, the Scenario Optimizer Agent ingests the combined context to simulate high-impact interventions (e.g., cool roofs, reflective pavement, shade trees) constrained by municipal budgets. The Orchestrator validates the solution against city policy constraints and exports an actionable GeoJSON map layer and prioritized investment report directly back to the planner.</a:t>
             </a:r>
           </a:p>
         </p:txBody>
